--- a/slides/release/09__inter-5-kafka-connect.pptx
+++ b/slides/release/09__inter-5-kafka-connect.pptx
@@ -5,27 +5,27 @@
     <p:sldMasterId id="2147483651" r:id="rId1"/>
   </p:sldMasterIdLst>
   <p:notesMasterIdLst>
-    <p:notesMasterId r:id="rId2"/>
+    <p:notesMasterId r:id="rId17"/>
   </p:notesMasterIdLst>
   <p:handoutMasterIdLst>
-    <p:handoutMasterId r:id="rId3"/>
+    <p:handoutMasterId r:id="rId18"/>
   </p:handoutMasterIdLst>
   <p:sldIdLst>
-    <p:sldId id="256" r:id="rId9"/>
-    <p:sldId id="257" r:id="rId10"/>
-    <p:sldId id="258" r:id="rId11"/>
-    <p:sldId id="259" r:id="rId12"/>
-    <p:sldId id="260" r:id="rId13"/>
-    <p:sldId id="261" r:id="rId14"/>
-    <p:sldId id="262" r:id="rId15"/>
-    <p:sldId id="263" r:id="rId16"/>
-    <p:sldId id="264" r:id="rId17"/>
-    <p:sldId id="265" r:id="rId18"/>
-    <p:sldId id="266" r:id="rId19"/>
-    <p:sldId id="267" r:id="rId20"/>
-    <p:sldId id="268" r:id="rId21"/>
-    <p:sldId id="269" r:id="rId22"/>
-    <p:sldId id="270" r:id="rId23"/>
+    <p:sldId id="256" r:id="rId2"/>
+    <p:sldId id="257" r:id="rId3"/>
+    <p:sldId id="258" r:id="rId4"/>
+    <p:sldId id="259" r:id="rId5"/>
+    <p:sldId id="260" r:id="rId6"/>
+    <p:sldId id="261" r:id="rId7"/>
+    <p:sldId id="262" r:id="rId8"/>
+    <p:sldId id="263" r:id="rId9"/>
+    <p:sldId id="264" r:id="rId10"/>
+    <p:sldId id="265" r:id="rId11"/>
+    <p:sldId id="266" r:id="rId12"/>
+    <p:sldId id="267" r:id="rId13"/>
+    <p:sldId id="268" r:id="rId14"/>
+    <p:sldId id="269" r:id="rId15"/>
+    <p:sldId id="270" r:id="rId16"/>
   </p:sldIdLst>
   <p:sldSz cx="9372600" cy="8297863"/>
   <p:notesSz cx="7315200" cy="9601200"/>
@@ -193,9 +193,7 @@
   <p:cmAuthor id="2" name="Mark Kerzner" initials="MK" lastIdx="6" clrIdx="1"/>
   <p:cmAuthor id="3" name="Mary Beth Conlee" initials="MBC" lastIdx="7" clrIdx="2"/>
   <p:cmAuthor id="4" name="Michelle" initials="M" lastIdx="5" clrIdx="3"/>
-  <p:cmAuthor id="5" name="Tricia Murphy" initials="TM" lastIdx="4" clrIdx="4">
-    <p:extLst/>
-  </p:cmAuthor>
+  <p:cmAuthor id="5" name="Tricia Murphy" initials="TM" lastIdx="4" clrIdx="4"/>
 </p:cmAuthorLst>
 </file>
 
@@ -765,7 +763,7 @@
 </file>
 
 <file path=ppt/notesSlides/notesSlide1.xml><?xml version="1.0" encoding="utf-8"?>
-<p:notes xmlns:a="http://schemas.openxmlformats.org/drawingml/2006/main" xmlns:p="http://schemas.openxmlformats.org/presentationml/2006/main" xmlns:r="http://schemas.openxmlformats.org/officeDocument/2006/relationships">
+<p:notes xmlns:a="http://schemas.openxmlformats.org/drawingml/2006/main" xmlns:r="http://schemas.openxmlformats.org/officeDocument/2006/relationships" xmlns:p="http://schemas.openxmlformats.org/presentationml/2006/main">
   <p:cSld>
     <p:spTree>
       <p:nvGrpSpPr>
@@ -785,34 +783,34 @@
         <p:nvSpPr>
           <p:cNvPr id="2" name="Slide Image Placeholder 1"/>
           <p:cNvSpPr>
+            <a:spLocks noGrp="1" noRot="1" noChangeAspect="1"/>
+          </p:cNvSpPr>
+          <p:nvPr>
+            <p:ph type="sldImg" idx="2"/>
+          </p:nvPr>
+        </p:nvSpPr>
+        <p:spPr/>
+      </p:sp>
+      <p:sp>
+        <p:nvSpPr>
+          <p:cNvPr id="3" name="Slide Number Placeholder 2"/>
+          <p:cNvSpPr>
             <a:spLocks noGrp="1"/>
           </p:cNvSpPr>
           <p:nvPr>
-            <p:ph type="sldImg" idx="2"/>
+            <p:ph type="sldNum" sz="quarter" idx="5"/>
           </p:nvPr>
         </p:nvSpPr>
         <p:spPr/>
       </p:sp>
       <p:sp>
         <p:nvSpPr>
-          <p:cNvPr id="3" name="Slide Number Placeholder 2"/>
+          <p:cNvPr id="4" name="Notes Placeholder 3"/>
           <p:cNvSpPr>
             <a:spLocks noGrp="1"/>
           </p:cNvSpPr>
           <p:nvPr>
-            <p:ph type="sldNum" idx="5" sz="quarter"/>
-          </p:nvPr>
-        </p:nvSpPr>
-        <p:spPr/>
-      </p:sp>
-      <p:sp>
-        <p:nvSpPr>
-          <p:cNvPr id="4" name="Notes Placeholder 3"/>
-          <p:cNvSpPr>
-            <a:spLocks noGrp="1"/>
-          </p:cNvSpPr>
-          <p:nvPr>
-            <p:ph type="body" idx="3" sz="quarter"/>
+            <p:ph type="body" sz="quarter" idx="3"/>
           </p:nvPr>
         </p:nvSpPr>
         <p:spPr/>
@@ -821,10 +819,7 @@
           <a:lstStyle/>
           <a:p>
             <a:r>
-              <a:t> For SSA's "several systems sharing events," Connect is how you get data OUT of those</a:t>
-            </a:r>
-            <a:r>
-              <a:t> systems into Kafka without asking each team to write and run a bespoke producer.</a:t>
+              <a:t> For SSA's "several systems sharing events," Connect is how you get data OUT of those systems into Kafka without asking each team to write and run a bespoke producer.</a:t>
             </a:r>
           </a:p>
         </p:txBody>
@@ -838,7 +833,7 @@
 </file>
 
 <file path=ppt/notesSlides/notesSlide2.xml><?xml version="1.0" encoding="utf-8"?>
-<p:notes xmlns:a="http://schemas.openxmlformats.org/drawingml/2006/main" xmlns:p="http://schemas.openxmlformats.org/presentationml/2006/main" xmlns:r="http://schemas.openxmlformats.org/officeDocument/2006/relationships">
+<p:notes xmlns:a="http://schemas.openxmlformats.org/drawingml/2006/main" xmlns:r="http://schemas.openxmlformats.org/officeDocument/2006/relationships" xmlns:p="http://schemas.openxmlformats.org/presentationml/2006/main">
   <p:cSld>
     <p:spTree>
       <p:nvGrpSpPr>
@@ -858,34 +853,34 @@
         <p:nvSpPr>
           <p:cNvPr id="2" name="Slide Image Placeholder 1"/>
           <p:cNvSpPr>
+            <a:spLocks noGrp="1" noRot="1" noChangeAspect="1"/>
+          </p:cNvSpPr>
+          <p:nvPr>
+            <p:ph type="sldImg" idx="2"/>
+          </p:nvPr>
+        </p:nvSpPr>
+        <p:spPr/>
+      </p:sp>
+      <p:sp>
+        <p:nvSpPr>
+          <p:cNvPr id="3" name="Slide Number Placeholder 2"/>
+          <p:cNvSpPr>
             <a:spLocks noGrp="1"/>
           </p:cNvSpPr>
           <p:nvPr>
-            <p:ph type="sldImg" idx="2"/>
+            <p:ph type="sldNum" sz="quarter" idx="5"/>
           </p:nvPr>
         </p:nvSpPr>
         <p:spPr/>
       </p:sp>
       <p:sp>
         <p:nvSpPr>
-          <p:cNvPr id="3" name="Slide Number Placeholder 2"/>
+          <p:cNvPr id="4" name="Notes Placeholder 3"/>
           <p:cNvSpPr>
             <a:spLocks noGrp="1"/>
           </p:cNvSpPr>
           <p:nvPr>
-            <p:ph type="sldNum" idx="5" sz="quarter"/>
-          </p:nvPr>
-        </p:nvSpPr>
-        <p:spPr/>
-      </p:sp>
-      <p:sp>
-        <p:nvSpPr>
-          <p:cNvPr id="4" name="Notes Placeholder 3"/>
-          <p:cNvSpPr>
-            <a:spLocks noGrp="1"/>
-          </p:cNvSpPr>
-          <p:nvPr>
-            <p:ph type="body" idx="3" sz="quarter"/>
+            <p:ph type="body" sz="quarter" idx="3"/>
           </p:nvPr>
         </p:nvSpPr>
         <p:spPr/>
@@ -894,10 +889,7 @@
           <a:lstStyle/>
           <a:p>
             <a:r>
-              <a:t> This is the same "scale by parallel tasks, rebalance on failure" model as consumer</a:t>
-            </a:r>
-            <a:r>
-              <a:t> groups — sink tasks literally ARE a consumer group under the hood.</a:t>
+              <a:t> This is the same "scale by parallel tasks, rebalance on failure" model as consumer groups — sink tasks literally ARE a consumer group under the hood.</a:t>
             </a:r>
           </a:p>
         </p:txBody>
@@ -911,7 +903,7 @@
 </file>
 
 <file path=ppt/notesSlides/notesSlide3.xml><?xml version="1.0" encoding="utf-8"?>
-<p:notes xmlns:a="http://schemas.openxmlformats.org/drawingml/2006/main" xmlns:p="http://schemas.openxmlformats.org/presentationml/2006/main" xmlns:r="http://schemas.openxmlformats.org/officeDocument/2006/relationships">
+<p:notes xmlns:a="http://schemas.openxmlformats.org/drawingml/2006/main" xmlns:r="http://schemas.openxmlformats.org/officeDocument/2006/relationships" xmlns:p="http://schemas.openxmlformats.org/presentationml/2006/main">
   <p:cSld>
     <p:spTree>
       <p:nvGrpSpPr>
@@ -931,34 +923,34 @@
         <p:nvSpPr>
           <p:cNvPr id="2" name="Slide Image Placeholder 1"/>
           <p:cNvSpPr>
+            <a:spLocks noGrp="1" noRot="1" noChangeAspect="1"/>
+          </p:cNvSpPr>
+          <p:nvPr>
+            <p:ph type="sldImg" idx="2"/>
+          </p:nvPr>
+        </p:nvSpPr>
+        <p:spPr/>
+      </p:sp>
+      <p:sp>
+        <p:nvSpPr>
+          <p:cNvPr id="3" name="Slide Number Placeholder 2"/>
+          <p:cNvSpPr>
             <a:spLocks noGrp="1"/>
           </p:cNvSpPr>
           <p:nvPr>
-            <p:ph type="sldImg" idx="2"/>
+            <p:ph type="sldNum" sz="quarter" idx="5"/>
           </p:nvPr>
         </p:nvSpPr>
         <p:spPr/>
       </p:sp>
       <p:sp>
         <p:nvSpPr>
-          <p:cNvPr id="3" name="Slide Number Placeholder 2"/>
+          <p:cNvPr id="4" name="Notes Placeholder 3"/>
           <p:cNvSpPr>
             <a:spLocks noGrp="1"/>
           </p:cNvSpPr>
           <p:nvPr>
-            <p:ph type="sldNum" idx="5" sz="quarter"/>
-          </p:nvPr>
-        </p:nvSpPr>
-        <p:spPr/>
-      </p:sp>
-      <p:sp>
-        <p:nvSpPr>
-          <p:cNvPr id="4" name="Notes Placeholder 3"/>
-          <p:cNvSpPr>
-            <a:spLocks noGrp="1"/>
-          </p:cNvSpPr>
-          <p:nvPr>
-            <p:ph type="body" idx="3" sz="quarter"/>
+            <p:ph type="body" sz="quarter" idx="3"/>
           </p:nvPr>
         </p:nvSpPr>
         <p:spPr/>
@@ -967,10 +959,7 @@
           <a:lstStyle/>
           <a:p>
             <a:r>
-              <a:t> Name-drop Debezium as the standard CDC option. The lab uses JDBC poll because it's</a:t>
-            </a:r>
-            <a:r>
-              <a:t> self-contained, but flag the DELETE blind spot explicitly.</a:t>
+              <a:t> Name-drop Debezium as the standard CDC option. The lab uses JDBC poll because it's self-contained, but flag the DELETE blind spot explicitly.</a:t>
             </a:r>
           </a:p>
         </p:txBody>
@@ -984,7 +973,7 @@
 </file>
 
 <file path=ppt/notesSlides/notesSlide4.xml><?xml version="1.0" encoding="utf-8"?>
-<p:notes xmlns:a="http://schemas.openxmlformats.org/drawingml/2006/main" xmlns:p="http://schemas.openxmlformats.org/presentationml/2006/main" xmlns:r="http://schemas.openxmlformats.org/officeDocument/2006/relationships">
+<p:notes xmlns:a="http://schemas.openxmlformats.org/drawingml/2006/main" xmlns:r="http://schemas.openxmlformats.org/officeDocument/2006/relationships" xmlns:p="http://schemas.openxmlformats.org/presentationml/2006/main">
   <p:cSld>
     <p:spTree>
       <p:nvGrpSpPr>
@@ -1004,34 +993,22 @@
         <p:nvSpPr>
           <p:cNvPr id="2" name="Slide Image Placeholder 1"/>
           <p:cNvSpPr>
+            <a:spLocks noGrp="1" noRot="1" noChangeAspect="1"/>
+          </p:cNvSpPr>
+          <p:nvPr>
+            <p:ph type="sldImg"/>
+          </p:nvPr>
+        </p:nvSpPr>
+        <p:spPr/>
+      </p:sp>
+      <p:sp>
+        <p:nvSpPr>
+          <p:cNvPr id="3" name="Notes Placeholder 2"/>
+          <p:cNvSpPr>
             <a:spLocks noGrp="1"/>
           </p:cNvSpPr>
           <p:nvPr>
-            <p:ph type="sldImg" idx="2"/>
-          </p:nvPr>
-        </p:nvSpPr>
-        <p:spPr/>
-      </p:sp>
-      <p:sp>
-        <p:nvSpPr>
-          <p:cNvPr id="3" name="Slide Number Placeholder 2"/>
-          <p:cNvSpPr>
-            <a:spLocks noGrp="1"/>
-          </p:cNvSpPr>
-          <p:nvPr>
-            <p:ph type="sldNum" idx="5" sz="quarter"/>
-          </p:nvPr>
-        </p:nvSpPr>
-        <p:spPr/>
-      </p:sp>
-      <p:sp>
-        <p:nvSpPr>
-          <p:cNvPr id="4" name="Notes Placeholder 3"/>
-          <p:cNvSpPr>
-            <a:spLocks noGrp="1"/>
-          </p:cNvSpPr>
-          <p:nvPr>
-            <p:ph type="body" idx="3" sz="quarter"/>
+            <p:ph type="body" idx="1"/>
           </p:nvPr>
         </p:nvSpPr>
         <p:spPr/>
@@ -1039,16 +1016,71 @@
           <a:bodyPr/>
           <a:lstStyle/>
           <a:p>
-            <a:r>
-              <a:t> The DLQ is the single most important operational feature here. Lab 06 injects a bad</a:t>
-            </a:r>
-            <a:r>
-              <a:t> record and inspects it in the DLQ with its error headers.</a:t>
-            </a:r>
+            <a:endParaRPr lang="en-US" dirty="0"/>
+          </a:p>
+        </p:txBody>
+      </p:sp>
+      <p:sp>
+        <p:nvSpPr>
+          <p:cNvPr id="4" name="Footer Placeholder 3"/>
+          <p:cNvSpPr>
+            <a:spLocks noGrp="1"/>
+          </p:cNvSpPr>
+          <p:nvPr>
+            <p:ph type="ftr" sz="quarter" idx="4"/>
+          </p:nvPr>
+        </p:nvSpPr>
+        <p:spPr/>
+        <p:txBody>
+          <a:bodyPr/>
+          <a:lstStyle/>
+          <a:p>
+            <a:pPr>
+              <a:defRPr/>
+            </a:pPr>
+            <a:r>
+              <a:rPr lang="en-US"/>
+              <a:t>Copyright © 2017 Elephant Scale. All rights reserved.</a:t>
+            </a:r>
+            <a:endParaRPr lang="en-US" dirty="0"/>
+          </a:p>
+        </p:txBody>
+      </p:sp>
+      <p:sp>
+        <p:nvSpPr>
+          <p:cNvPr id="5" name="Slide Number Placeholder 4"/>
+          <p:cNvSpPr>
+            <a:spLocks noGrp="1"/>
+          </p:cNvSpPr>
+          <p:nvPr>
+            <p:ph type="sldNum" sz="quarter" idx="5"/>
+          </p:nvPr>
+        </p:nvSpPr>
+        <p:spPr/>
+        <p:txBody>
+          <a:bodyPr/>
+          <a:lstStyle/>
+          <a:p>
+            <a:pPr>
+              <a:defRPr/>
+            </a:pPr>
+            <a:fld id="{EFAADD5D-AF76-45EE-AA5F-6DAC73BF167A}" type="slidenum">
+              <a:rPr lang="en-US" smtClean="0"/>
+              <a:pPr>
+                <a:defRPr/>
+              </a:pPr>
+              <a:t>11</a:t>
+            </a:fld>
+            <a:endParaRPr lang="en-US" dirty="0"/>
           </a:p>
         </p:txBody>
       </p:sp>
     </p:spTree>
+    <p:extLst>
+      <p:ext uri="{BB962C8B-B14F-4D97-AF65-F5344CB8AC3E}">
+        <p14:creationId xmlns:p14="http://schemas.microsoft.com/office/powerpoint/2010/main" val="3064519043"/>
+      </p:ext>
+    </p:extLst>
   </p:cSld>
   <p:clrMapOvr>
     <a:masterClrMapping/>
@@ -1057,7 +1089,7 @@
 </file>
 
 <file path=ppt/notesSlides/notesSlide5.xml><?xml version="1.0" encoding="utf-8"?>
-<p:notes xmlns:a="http://schemas.openxmlformats.org/drawingml/2006/main" xmlns:p="http://schemas.openxmlformats.org/presentationml/2006/main" xmlns:r="http://schemas.openxmlformats.org/officeDocument/2006/relationships">
+<p:notes xmlns:a="http://schemas.openxmlformats.org/drawingml/2006/main" xmlns:r="http://schemas.openxmlformats.org/officeDocument/2006/relationships" xmlns:p="http://schemas.openxmlformats.org/presentationml/2006/main">
   <p:cSld>
     <p:spTree>
       <p:nvGrpSpPr>
@@ -1077,34 +1109,34 @@
         <p:nvSpPr>
           <p:cNvPr id="2" name="Slide Image Placeholder 1"/>
           <p:cNvSpPr>
+            <a:spLocks noGrp="1" noRot="1" noChangeAspect="1"/>
+          </p:cNvSpPr>
+          <p:nvPr>
+            <p:ph type="sldImg" idx="2"/>
+          </p:nvPr>
+        </p:nvSpPr>
+        <p:spPr/>
+      </p:sp>
+      <p:sp>
+        <p:nvSpPr>
+          <p:cNvPr id="3" name="Slide Number Placeholder 2"/>
+          <p:cNvSpPr>
             <a:spLocks noGrp="1"/>
           </p:cNvSpPr>
           <p:nvPr>
-            <p:ph type="sldImg" idx="2"/>
+            <p:ph type="sldNum" sz="quarter" idx="5"/>
           </p:nvPr>
         </p:nvSpPr>
         <p:spPr/>
       </p:sp>
       <p:sp>
         <p:nvSpPr>
-          <p:cNvPr id="3" name="Slide Number Placeholder 2"/>
+          <p:cNvPr id="4" name="Notes Placeholder 3"/>
           <p:cNvSpPr>
             <a:spLocks noGrp="1"/>
           </p:cNvSpPr>
           <p:nvPr>
-            <p:ph type="sldNum" idx="5" sz="quarter"/>
-          </p:nvPr>
-        </p:nvSpPr>
-        <p:spPr/>
-      </p:sp>
-      <p:sp>
-        <p:nvSpPr>
-          <p:cNvPr id="4" name="Notes Placeholder 3"/>
-          <p:cNvSpPr>
-            <a:spLocks noGrp="1"/>
-          </p:cNvSpPr>
-          <p:nvPr>
-            <p:ph type="body" idx="3" sz="quarter"/>
+            <p:ph type="body" sz="quarter" idx="3"/>
           </p:nvPr>
         </p:nvSpPr>
         <p:spPr/>
@@ -1113,10 +1145,77 @@
           <a:lstStyle/>
           <a:p>
             <a:r>
-              <a:t> Tie to SSA: several source systems → Connect sources → Kafka → sink to a store that powers</a:t>
-            </a:r>
-            <a:r>
-              <a:t> their real-time reporting. Connect is the integration spine.</a:t>
+              <a:t> The DLQ is the single most important operational feature here. Lab 06 injects a bad record and inspects it in the DLQ with its error headers.</a:t>
+            </a:r>
+          </a:p>
+        </p:txBody>
+      </p:sp>
+    </p:spTree>
+  </p:cSld>
+  <p:clrMapOvr>
+    <a:masterClrMapping/>
+  </p:clrMapOvr>
+</p:notes>
+</file>
+
+<file path=ppt/notesSlides/notesSlide6.xml><?xml version="1.0" encoding="utf-8"?>
+<p:notes xmlns:a="http://schemas.openxmlformats.org/drawingml/2006/main" xmlns:r="http://schemas.openxmlformats.org/officeDocument/2006/relationships" xmlns:p="http://schemas.openxmlformats.org/presentationml/2006/main">
+  <p:cSld>
+    <p:spTree>
+      <p:nvGrpSpPr>
+        <p:cNvPr id="1" name=""/>
+        <p:cNvGrpSpPr/>
+        <p:nvPr/>
+      </p:nvGrpSpPr>
+      <p:grpSpPr>
+        <a:xfrm>
+          <a:off x="0" y="0"/>
+          <a:ext cx="0" cy="0"/>
+          <a:chOff x="0" y="0"/>
+          <a:chExt cx="0" cy="0"/>
+        </a:xfrm>
+      </p:grpSpPr>
+      <p:sp>
+        <p:nvSpPr>
+          <p:cNvPr id="2" name="Slide Image Placeholder 1"/>
+          <p:cNvSpPr>
+            <a:spLocks noGrp="1" noRot="1" noChangeAspect="1"/>
+          </p:cNvSpPr>
+          <p:nvPr>
+            <p:ph type="sldImg" idx="2"/>
+          </p:nvPr>
+        </p:nvSpPr>
+        <p:spPr/>
+      </p:sp>
+      <p:sp>
+        <p:nvSpPr>
+          <p:cNvPr id="3" name="Slide Number Placeholder 2"/>
+          <p:cNvSpPr>
+            <a:spLocks noGrp="1"/>
+          </p:cNvSpPr>
+          <p:nvPr>
+            <p:ph type="sldNum" sz="quarter" idx="5"/>
+          </p:nvPr>
+        </p:nvSpPr>
+        <p:spPr/>
+      </p:sp>
+      <p:sp>
+        <p:nvSpPr>
+          <p:cNvPr id="4" name="Notes Placeholder 3"/>
+          <p:cNvSpPr>
+            <a:spLocks noGrp="1"/>
+          </p:cNvSpPr>
+          <p:nvPr>
+            <p:ph type="body" sz="quarter" idx="3"/>
+          </p:nvPr>
+        </p:nvSpPr>
+        <p:spPr/>
+        <p:txBody>
+          <a:bodyPr/>
+          <a:lstStyle/>
+          <a:p>
+            <a:r>
+              <a:t> Tie to SSA: several source systems → Connect sources → Kafka → sink to a store that powers their real-time reporting. Connect is the integration spine.</a:t>
             </a:r>
           </a:p>
         </p:txBody>
@@ -2643,7 +2742,7 @@
 </file>
 
 <file path=ppt/slides/slide1.xml><?xml version="1.0" encoding="utf-8"?>
-<p:sld xmlns:a="http://schemas.openxmlformats.org/drawingml/2006/main" xmlns:p="http://schemas.openxmlformats.org/presentationml/2006/main" xmlns:r="http://schemas.openxmlformats.org/officeDocument/2006/relationships">
+<p:sld xmlns:a="http://schemas.openxmlformats.org/drawingml/2006/main" xmlns:r="http://schemas.openxmlformats.org/officeDocument/2006/relationships" xmlns:p="http://schemas.openxmlformats.org/presentationml/2006/main">
   <p:cSld>
     <p:spTree>
       <p:nvGrpSpPr>
@@ -2651,7 +2750,14 @@
         <p:cNvGrpSpPr/>
         <p:nvPr/>
       </p:nvGrpSpPr>
-      <p:grpSpPr/>
+      <p:grpSpPr>
+        <a:xfrm>
+          <a:off x="0" y="0"/>
+          <a:ext cx="0" cy="0"/>
+          <a:chOff x="0" y="0"/>
+          <a:chExt cx="0" cy="0"/>
+        </a:xfrm>
+      </p:grpSpPr>
       <p:sp>
         <p:nvSpPr>
           <p:cNvPr id="2" name="Subtitle 1"/>
@@ -2659,14 +2765,16 @@
             <a:spLocks noGrp="1"/>
           </p:cNvSpPr>
           <p:nvPr>
-            <p:ph type="subTitle" idx="1" sz="quarter"/>
+            <p:ph type="subTitle" sz="quarter" idx="1"/>
           </p:nvPr>
         </p:nvSpPr>
         <p:spPr/>
         <p:txBody>
           <a:bodyPr/>
           <a:lstStyle/>
-          <a:p/>
+          <a:p>
+            <a:endParaRPr/>
+          </a:p>
         </p:txBody>
       </p:sp>
       <p:sp>
@@ -2692,9 +2800,6 @@
               </a:rPr>
               <a:t>Intermediate 5 — Kafka Connect</a:t>
             </a:r>
-            <a:endParaRPr sz="4200" b="1" i="0">
-              <a:latin typeface="Times New Roman"/>
-            </a:endParaRPr>
           </a:p>
         </p:txBody>
       </p:sp>
@@ -2740,7 +2845,7 @@
 </file>
 
 <file path=ppt/slides/slide10.xml><?xml version="1.0" encoding="utf-8"?>
-<p:sld xmlns:a="http://schemas.openxmlformats.org/drawingml/2006/main" xmlns:p="http://schemas.openxmlformats.org/presentationml/2006/main" xmlns:r="http://schemas.openxmlformats.org/officeDocument/2006/relationships">
+<p:sld xmlns:a="http://schemas.openxmlformats.org/drawingml/2006/main" xmlns:r="http://schemas.openxmlformats.org/officeDocument/2006/relationships" xmlns:p="http://schemas.openxmlformats.org/presentationml/2006/main">
   <p:cSld>
     <p:spTree>
       <p:nvGrpSpPr>
@@ -2748,7 +2853,14 @@
         <p:cNvGrpSpPr/>
         <p:nvPr/>
       </p:nvGrpSpPr>
-      <p:grpSpPr/>
+      <p:grpSpPr>
+        <a:xfrm>
+          <a:off x="0" y="0"/>
+          <a:ext cx="0" cy="0"/>
+          <a:chOff x="0" y="0"/>
+          <a:chExt cx="0" cy="0"/>
+        </a:xfrm>
+      </p:grpSpPr>
       <p:sp>
         <p:nvSpPr>
           <p:cNvPr id="2" name="Title 1"/>
@@ -2805,10 +2917,7 @@
               <a:t> S3 sink</a:t>
             </a:r>
             <a:r>
-              <a:t> batches topic records into files in object storage (our lab uses MinIO, an</a:t>
-            </a:r>
-            <a:r>
-              <a:t> S3-compatible store)</a:t>
+              <a:t> batches topic records into files in object storage (our lab uses MinIO, an S3-compatible store)</a:t>
             </a:r>
           </a:p>
           <a:p>
@@ -2833,7 +2942,9 @@
               <a:t> Scaling = more tasks (up to the topic's partition count — the familiar ceiling)</a:t>
             </a:r>
           </a:p>
-          <a:p/>
+          <a:p>
+            <a:endParaRPr/>
+          </a:p>
         </p:txBody>
       </p:sp>
       <p:sp>
@@ -2885,7 +2996,7 @@
         </p:blipFill>
         <p:spPr>
           <a:xfrm>
-            <a:off x="0" y="4425696"/>
+            <a:off x="-19050" y="5215731"/>
             <a:ext cx="8915400" cy="377615"/>
           </a:xfrm>
           <a:prstGeom prst="rect">
@@ -2902,7 +3013,7 @@
 </file>
 
 <file path=ppt/slides/slide11.xml><?xml version="1.0" encoding="utf-8"?>
-<p:sld xmlns:a="http://schemas.openxmlformats.org/drawingml/2006/main" xmlns:p="http://schemas.openxmlformats.org/presentationml/2006/main" xmlns:r="http://schemas.openxmlformats.org/officeDocument/2006/relationships">
+<p:sld xmlns:a="http://schemas.openxmlformats.org/drawingml/2006/main" xmlns:r="http://schemas.openxmlformats.org/officeDocument/2006/relationships" xmlns:p="http://schemas.openxmlformats.org/presentationml/2006/main">
   <p:cSld>
     <p:spTree>
       <p:nvGrpSpPr>
@@ -2910,7 +3021,14 @@
         <p:cNvGrpSpPr/>
         <p:nvPr/>
       </p:nvGrpSpPr>
-      <p:grpSpPr/>
+      <p:grpSpPr>
+        <a:xfrm>
+          <a:off x="0" y="0"/>
+          <a:ext cx="0" cy="0"/>
+          <a:chOff x="0" y="0"/>
+          <a:chExt cx="0" cy="0"/>
+        </a:xfrm>
+      </p:grpSpPr>
       <p:sp>
         <p:nvSpPr>
           <p:cNvPr id="2" name="Title 1"/>
@@ -2964,10 +3082,7 @@
               <a:t> exactly-once</a:t>
             </a:r>
             <a:r>
-              <a:t> (Kafka 3.3+): they use transactions to atomically</a:t>
-            </a:r>
-            <a:r>
-              <a:t> produce records and commit source offsets — no duplicate or lost source records</a:t>
+              <a:t> (Kafka 3.3+): they use transactions to atomically produce records and commit source offsets — no duplicate or lost source records</a:t>
             </a:r>
           </a:p>
           <a:p>
@@ -2983,10 +3098,7 @@
               <a:t> at-least-once</a:t>
             </a:r>
             <a:r>
-              <a:t> ; exactly-once to the destination depends on</a:t>
-            </a:r>
-            <a:r>
-              <a:t> the sink being</a:t>
+              <a:t> ; exactly-once to the destination depends on the sink being</a:t>
             </a:r>
             <a:r>
               <a:rPr b="1"/>
@@ -3068,7 +3180,7 @@
 </file>
 
 <file path=ppt/slides/slide12.xml><?xml version="1.0" encoding="utf-8"?>
-<p:sld xmlns:a="http://schemas.openxmlformats.org/drawingml/2006/main" xmlns:p="http://schemas.openxmlformats.org/presentationml/2006/main" xmlns:r="http://schemas.openxmlformats.org/officeDocument/2006/relationships">
+<p:sld xmlns:a="http://schemas.openxmlformats.org/drawingml/2006/main" xmlns:r="http://schemas.openxmlformats.org/officeDocument/2006/relationships" xmlns:p="http://schemas.openxmlformats.org/presentationml/2006/main">
   <p:cSld>
     <p:spTree>
       <p:nvGrpSpPr>
@@ -3076,7 +3188,14 @@
         <p:cNvGrpSpPr/>
         <p:nvPr/>
       </p:nvGrpSpPr>
-      <p:grpSpPr/>
+      <p:grpSpPr>
+        <a:xfrm>
+          <a:off x="0" y="0"/>
+          <a:ext cx="0" cy="0"/>
+          <a:chOff x="0" y="0"/>
+          <a:chExt cx="0" cy="0"/>
+        </a:xfrm>
+      </p:grpSpPr>
       <p:sp>
         <p:nvSpPr>
           <p:cNvPr id="2" name="Title 1"/>
@@ -3114,10 +3233,7 @@
           <a:lstStyle/>
           <a:p>
             <a:r>
-              <a:t> Real pipelines hit bad records — malformed JSON, a schema mismatch, a value the sink rejects.</a:t>
-            </a:r>
-            <a:r>
-              <a:t> Connect's error handling decides what happens.</a:t>
+              <a:t> Real pipelines hit bad records — malformed JSON, a schema mismatch, a value the sink rejects. Connect's error handling decides what happens.</a:t>
             </a:r>
           </a:p>
           <a:p>
@@ -3145,14 +3261,15 @@
               <a:t> Dead Letter Queue (DLQ)</a:t>
             </a:r>
             <a:r>
-              <a:t> : route bad records to a separate topic and</a:t>
-            </a:r>
-            <a:r>
-              <a:t> keep going</a:t>
-            </a:r>
-          </a:p>
-          <a:p/>
-          <a:p/>
+              <a:t> : route bad records to a separate topic and keep going</a:t>
+            </a:r>
+          </a:p>
+          <a:p>
+            <a:endParaRPr/>
+          </a:p>
+          <a:p>
+            <a:endParaRPr/>
+          </a:p>
           <a:p>
             <a:r>
               <a:t> Good records flow; bad ones land in</a:t>
@@ -3174,6 +3291,186 @@
           <a:p>
             <a:r>
               <a:t> You monitor and reprocess the DLQ out of band — the pipeline never stalls on one bad message</a:t>
+            </a:r>
+          </a:p>
+        </p:txBody>
+      </p:sp>
+      <p:sp>
+        <p:nvSpPr>
+          <p:cNvPr id="4" name="TextBox 3"/>
+          <p:cNvSpPr txBox="1"/>
+          <p:nvPr/>
+        </p:nvSpPr>
+        <p:spPr>
+          <a:xfrm>
+            <a:off x="704088" y="8065008"/>
+            <a:ext cx="8915400" cy="228600"/>
+          </a:xfrm>
+          <a:prstGeom prst="rect">
+            <a:avLst/>
+          </a:prstGeom>
+          <a:noFill/>
+        </p:spPr>
+        <p:txBody>
+          <a:bodyPr wrap="none">
+            <a:spAutoFit/>
+          </a:bodyPr>
+          <a:lstStyle/>
+          <a:p>
+            <a:r>
+              <a:rPr sz="800">
+                <a:solidFill>
+                  <a:srgbClr val="000000"/>
+                </a:solidFill>
+              </a:rPr>
+              <a:t>Copyright © 2026 by Elephant Scale, All Rights Reserved</a:t>
+            </a:r>
+          </a:p>
+        </p:txBody>
+      </p:sp>
+      <p:pic>
+        <p:nvPicPr>
+          <p:cNvPr id="5" name="Picture 4" descr="1.png"/>
+          <p:cNvPicPr>
+            <a:picLocks noChangeAspect="1"/>
+          </p:cNvPicPr>
+          <p:nvPr/>
+        </p:nvPicPr>
+        <p:blipFill>
+          <a:blip r:embed="rId3"/>
+          <a:stretch>
+            <a:fillRect/>
+          </a:stretch>
+        </p:blipFill>
+        <p:spPr>
+          <a:xfrm>
+            <a:off x="0" y="2869129"/>
+            <a:ext cx="9093200" cy="1054100"/>
+          </a:xfrm>
+          <a:prstGeom prst="rect">
+            <a:avLst/>
+          </a:prstGeom>
+        </p:spPr>
+      </p:pic>
+    </p:spTree>
+  </p:cSld>
+  <p:clrMapOvr>
+    <a:masterClrMapping/>
+  </p:clrMapOvr>
+</p:sld>
+</file>
+
+<file path=ppt/slides/slide13.xml><?xml version="1.0" encoding="utf-8"?>
+<p:sld xmlns:a="http://schemas.openxmlformats.org/drawingml/2006/main" xmlns:r="http://schemas.openxmlformats.org/officeDocument/2006/relationships" xmlns:p="http://schemas.openxmlformats.org/presentationml/2006/main">
+  <p:cSld>
+    <p:spTree>
+      <p:nvGrpSpPr>
+        <p:cNvPr id="1" name=""/>
+        <p:cNvGrpSpPr/>
+        <p:nvPr/>
+      </p:nvGrpSpPr>
+      <p:grpSpPr>
+        <a:xfrm>
+          <a:off x="0" y="0"/>
+          <a:ext cx="0" cy="0"/>
+          <a:chOff x="0" y="0"/>
+          <a:chExt cx="0" cy="0"/>
+        </a:xfrm>
+      </p:grpSpPr>
+      <p:sp>
+        <p:nvSpPr>
+          <p:cNvPr id="2" name="Title 1"/>
+          <p:cNvSpPr>
+            <a:spLocks noGrp="1"/>
+          </p:cNvSpPr>
+          <p:nvPr>
+            <p:ph type="title"/>
+          </p:nvPr>
+        </p:nvSpPr>
+        <p:spPr/>
+        <p:txBody>
+          <a:bodyPr/>
+          <a:lstStyle/>
+          <a:p>
+            <a:r>
+              <a:t>Single Message Transforms (SMTs)</a:t>
+            </a:r>
+          </a:p>
+        </p:txBody>
+      </p:sp>
+      <p:sp>
+        <p:nvSpPr>
+          <p:cNvPr id="3" name="Content Placeholder 2"/>
+          <p:cNvSpPr>
+            <a:spLocks noGrp="1"/>
+          </p:cNvSpPr>
+          <p:nvPr>
+            <p:ph idx="1"/>
+          </p:nvPr>
+        </p:nvSpPr>
+        <p:spPr/>
+        <p:txBody>
+          <a:bodyPr/>
+          <a:lstStyle/>
+          <a:p>
+            <a:r>
+              <a:rPr dirty="0"/>
+              <a:t> Lightweight, per-record tweaks applied</a:t>
+            </a:r>
+            <a:r>
+              <a:rPr b="1" dirty="0"/>
+              <a:t> inside</a:t>
+            </a:r>
+            <a:r>
+              <a:rPr dirty="0"/>
+              <a:t> Connect — no separate stream processor.</a:t>
+            </a:r>
+          </a:p>
+          <a:p>
+            <a:r>
+              <a:rPr dirty="0"/>
+              <a:t> Rename/insert/mask fields, route to topics, cast types, add timestamps</a:t>
+            </a:r>
+          </a:p>
+          <a:p>
+            <a:r>
+              <a:rPr dirty="0"/>
+              <a:t> Configured inline on the connector; run per record as it passes through</a:t>
+            </a:r>
+          </a:p>
+          <a:p>
+            <a:endParaRPr dirty="0"/>
+          </a:p>
+          <a:p>
+            <a:endParaRPr lang="en-US" dirty="0"/>
+          </a:p>
+          <a:p>
+            <a:endParaRPr lang="en-US" dirty="0"/>
+          </a:p>
+          <a:p>
+            <a:endParaRPr lang="en-US" dirty="0"/>
+          </a:p>
+          <a:p>
+            <a:endParaRPr dirty="0"/>
+          </a:p>
+          <a:p>
+            <a:r>
+              <a:rPr dirty="0"/>
+              <a:t> Great for small shaping (mask a SSN, drop a column, route by name)</a:t>
+            </a:r>
+          </a:p>
+          <a:p>
+            <a:r>
+              <a:rPr dirty="0"/>
+              <a:t> For real joins/aggregations, use</a:t>
+            </a:r>
+            <a:r>
+              <a:rPr b="1" dirty="0"/>
+              <a:t> stream processing</a:t>
+            </a:r>
+            <a:r>
+              <a:rPr dirty="0"/>
+              <a:t> (next module) — SMTs are per-record only</a:t>
             </a:r>
           </a:p>
         </p:txBody>
@@ -3227,8 +3524,8 @@
         </p:blipFill>
         <p:spPr>
           <a:xfrm>
-            <a:off x="0" y="2670048"/>
-            <a:ext cx="9093200" cy="1054100"/>
+            <a:off x="193675" y="3947447"/>
+            <a:ext cx="8915400" cy="923508"/>
           </a:xfrm>
           <a:prstGeom prst="rect">
             <a:avLst/>
@@ -3243,8 +3540,8 @@
 </p:sld>
 </file>
 
-<file path=ppt/slides/slide13.xml><?xml version="1.0" encoding="utf-8"?>
-<p:sld xmlns:a="http://schemas.openxmlformats.org/drawingml/2006/main" xmlns:p="http://schemas.openxmlformats.org/presentationml/2006/main" xmlns:r="http://schemas.openxmlformats.org/officeDocument/2006/relationships">
+<file path=ppt/slides/slide14.xml><?xml version="1.0" encoding="utf-8"?>
+<p:sld xmlns:a="http://schemas.openxmlformats.org/drawingml/2006/main" xmlns:r="http://schemas.openxmlformats.org/officeDocument/2006/relationships" xmlns:p="http://schemas.openxmlformats.org/presentationml/2006/main">
   <p:cSld>
     <p:spTree>
       <p:nvGrpSpPr>
@@ -3252,7 +3549,14 @@
         <p:cNvGrpSpPr/>
         <p:nvPr/>
       </p:nvGrpSpPr>
-      <p:grpSpPr/>
+      <p:grpSpPr>
+        <a:xfrm>
+          <a:off x="0" y="0"/>
+          <a:ext cx="0" cy="0"/>
+          <a:chOff x="0" y="0"/>
+          <a:chExt cx="0" cy="0"/>
+        </a:xfrm>
+      </p:grpSpPr>
       <p:sp>
         <p:nvSpPr>
           <p:cNvPr id="2" name="Title 1"/>
@@ -3269,7 +3573,7 @@
           <a:lstStyle/>
           <a:p>
             <a:r>
-              <a:t>Single Message Transforms (SMTs)</a:t>
+              <a:t>Integration Patterns</a:t>
             </a:r>
           </a:p>
         </p:txBody>
@@ -3290,44 +3594,712 @@
           <a:lstStyle/>
           <a:p>
             <a:r>
-              <a:t> Lightweight, per-record tweaks applied</a:t>
-            </a:r>
+              <a:t> Where Connect fits in a real architecture:</a:t>
+            </a:r>
+          </a:p>
+          <a:p>
             <a:r>
               <a:rPr b="1"/>
-              <a:t> inside</a:t>
-            </a:r>
-            <a:r>
-              <a:t> Connect — no separate stream processor.</a:t>
-            </a:r>
-          </a:p>
-          <a:p>
-            <a:r>
-              <a:t> Rename/insert/mask fields, route to topics, cast types, add timestamps</a:t>
-            </a:r>
-          </a:p>
-          <a:p>
-            <a:r>
-              <a:t> Configured inline on the connector; run per record as it passes through</a:t>
-            </a:r>
-          </a:p>
-          <a:p/>
-          <a:p/>
-          <a:p>
-            <a:r>
-              <a:t> Great for small shaping (mask a SSN, drop a column, route by name)</a:t>
-            </a:r>
-          </a:p>
-          <a:p>
-            <a:r>
-              <a:t> For real joins/aggregations, use</a:t>
+              <a:t> Databases</a:t>
+            </a:r>
+            <a:r>
+              <a:t> — JDBC source/sink, or</a:t>
             </a:r>
             <a:r>
               <a:rPr b="1"/>
-              <a:t> stream processing</a:t>
-            </a:r>
-            <a:r>
-              <a:t> (next module) — SMTs are per-record only</a:t>
-            </a:r>
+              <a:t> CDC</a:t>
+            </a:r>
+            <a:r>
+              <a:t> (Debezium) for full change capture</a:t>
+            </a:r>
+          </a:p>
+          <a:p>
+            <a:r>
+              <a:rPr b="1"/>
+              <a:t> Object storage</a:t>
+            </a:r>
+            <a:r>
+              <a:t> — S3/GCS/Azure sinks for a data lake or archival (our lab: MinIO)</a:t>
+            </a:r>
+          </a:p>
+          <a:p>
+            <a:r>
+              <a:rPr b="1"/>
+              <a:t> Search</a:t>
+            </a:r>
+            <a:r>
+              <a:t> — Elasticsearch/OpenSearch sinks for real-time indexing</a:t>
+            </a:r>
+          </a:p>
+          <a:p>
+            <a:r>
+              <a:rPr b="1"/>
+              <a:t> Warehouses</a:t>
+            </a:r>
+            <a:r>
+              <a:t> — sinks into Snowflake/BigQuery/Redshift for analytics</a:t>
+            </a:r>
+          </a:p>
+          <a:p>
+            <a:r>
+              <a:rPr b="1"/>
+              <a:t> When NOT to use Connect</a:t>
+            </a:r>
+            <a:r>
+              <a:t> — if you need rich per-record business logic, a real app or a stream processor may fit better than a connector + SMTs</a:t>
+            </a:r>
+          </a:p>
+        </p:txBody>
+      </p:sp>
+      <p:sp>
+        <p:nvSpPr>
+          <p:cNvPr id="4" name="TextBox 3"/>
+          <p:cNvSpPr txBox="1"/>
+          <p:nvPr/>
+        </p:nvSpPr>
+        <p:spPr>
+          <a:xfrm>
+            <a:off x="704088" y="8065008"/>
+            <a:ext cx="8915400" cy="228600"/>
+          </a:xfrm>
+          <a:prstGeom prst="rect">
+            <a:avLst/>
+          </a:prstGeom>
+          <a:noFill/>
+        </p:spPr>
+        <p:txBody>
+          <a:bodyPr wrap="none">
+            <a:spAutoFit/>
+          </a:bodyPr>
+          <a:lstStyle/>
+          <a:p>
+            <a:r>
+              <a:rPr sz="800">
+                <a:solidFill>
+                  <a:srgbClr val="000000"/>
+                </a:solidFill>
+              </a:rPr>
+              <a:t>Copyright © 2026 by Elephant Scale, All Rights Reserved</a:t>
+            </a:r>
+          </a:p>
+        </p:txBody>
+      </p:sp>
+    </p:spTree>
+  </p:cSld>
+  <p:clrMapOvr>
+    <a:masterClrMapping/>
+  </p:clrMapOvr>
+</p:sld>
+</file>
+
+<file path=ppt/slides/slide15.xml><?xml version="1.0" encoding="utf-8"?>
+<p:sld xmlns:a="http://schemas.openxmlformats.org/drawingml/2006/main" xmlns:r="http://schemas.openxmlformats.org/officeDocument/2006/relationships" xmlns:p="http://schemas.openxmlformats.org/presentationml/2006/main">
+  <p:cSld>
+    <p:spTree>
+      <p:nvGrpSpPr>
+        <p:cNvPr id="1" name=""/>
+        <p:cNvGrpSpPr/>
+        <p:nvPr/>
+      </p:nvGrpSpPr>
+      <p:grpSpPr>
+        <a:xfrm>
+          <a:off x="0" y="0"/>
+          <a:ext cx="0" cy="0"/>
+          <a:chOff x="0" y="0"/>
+          <a:chExt cx="0" cy="0"/>
+        </a:xfrm>
+      </p:grpSpPr>
+      <p:sp>
+        <p:nvSpPr>
+          <p:cNvPr id="2" name="Title 1"/>
+          <p:cNvSpPr>
+            <a:spLocks noGrp="1"/>
+          </p:cNvSpPr>
+          <p:nvPr>
+            <p:ph type="title"/>
+          </p:nvPr>
+        </p:nvSpPr>
+        <p:spPr/>
+        <p:txBody>
+          <a:bodyPr/>
+          <a:lstStyle/>
+          <a:p>
+            <a:r>
+              <a:t>Summary</a:t>
+            </a:r>
+          </a:p>
+        </p:txBody>
+      </p:sp>
+      <p:sp>
+        <p:nvSpPr>
+          <p:cNvPr id="3" name="Content Placeholder 2"/>
+          <p:cNvSpPr>
+            <a:spLocks noGrp="1"/>
+          </p:cNvSpPr>
+          <p:nvPr>
+            <p:ph idx="1"/>
+          </p:nvPr>
+        </p:nvSpPr>
+        <p:spPr/>
+        <p:txBody>
+          <a:bodyPr/>
+          <a:lstStyle/>
+          <a:p>
+            <a:r>
+              <a:rPr b="1"/>
+              <a:t> Kafka Connect</a:t>
+            </a:r>
+            <a:r>
+              <a:t> streams data in/out of Kafka as</a:t>
+            </a:r>
+            <a:r>
+              <a:rPr b="1"/>
+              <a:t> configuration</a:t>
+            </a:r>
+            <a:r>
+              <a:t> , not custom apps</a:t>
+            </a:r>
+          </a:p>
+          <a:p>
+            <a:r>
+              <a:rPr b="1"/>
+              <a:t> Workers</a:t>
+            </a:r>
+            <a:r>
+              <a:t> run</a:t>
+            </a:r>
+            <a:r>
+              <a:rPr b="1"/>
+              <a:t> connectors</a:t>
+            </a:r>
+            <a:r>
+              <a:t> , which split work into parallel</a:t>
+            </a:r>
+            <a:r>
+              <a:rPr b="1"/>
+              <a:t> tasks</a:t>
+            </a:r>
+            <a:r>
+              <a:t> ; state lives in Kafka topics, so workers are stateless and fault-tolerant</a:t>
+            </a:r>
+          </a:p>
+          <a:p>
+            <a:r>
+              <a:rPr b="1"/>
+              <a:t> Source</a:t>
+            </a:r>
+            <a:r>
+              <a:t> connectors pull in (JDBC poll vs.</a:t>
+            </a:r>
+            <a:r>
+              <a:rPr b="1"/>
+              <a:t> CDC</a:t>
+            </a:r>
+            <a:r>
+              <a:t> for deletes);</a:t>
+            </a:r>
+            <a:r>
+              <a:rPr b="1"/>
+              <a:t> sink</a:t>
+            </a:r>
+            <a:r>
+              <a:t> connectors push out (a consumer group under the hood)</a:t>
+            </a:r>
+          </a:p>
+          <a:p>
+            <a:r>
+              <a:rPr b="1"/>
+              <a:t> Exactly-once</a:t>
+            </a:r>
+            <a:r>
+              <a:t> is built into sources; sink exactly-once needs an</a:t>
+            </a:r>
+            <a:r>
+              <a:rPr b="1"/>
+              <a:t> idempotent</a:t>
+            </a:r>
+            <a:r>
+              <a:t> destination</a:t>
+            </a:r>
+          </a:p>
+          <a:p>
+            <a:r>
+              <a:rPr b="1"/>
+              <a:t> DLQs</a:t>
+            </a:r>
+            <a:r>
+              <a:t> keep pipelines running past bad records;</a:t>
+            </a:r>
+            <a:r>
+              <a:rPr b="1"/>
+              <a:t> SMTs</a:t>
+            </a:r>
+            <a:r>
+              <a:t> do lightweight per-record shaping</a:t>
+            </a:r>
+          </a:p>
+          <a:p>
+            <a:r>
+              <a:t> Connect is the</a:t>
+            </a:r>
+            <a:r>
+              <a:rPr b="1"/>
+              <a:t> integration spine</a:t>
+            </a:r>
+            <a:r>
+              <a:t> for databases, object storage, search, and warehouses</a:t>
+            </a:r>
+          </a:p>
+        </p:txBody>
+      </p:sp>
+      <p:sp>
+        <p:nvSpPr>
+          <p:cNvPr id="4" name="TextBox 3"/>
+          <p:cNvSpPr txBox="1"/>
+          <p:nvPr/>
+        </p:nvSpPr>
+        <p:spPr>
+          <a:xfrm>
+            <a:off x="704088" y="8065008"/>
+            <a:ext cx="8915400" cy="228600"/>
+          </a:xfrm>
+          <a:prstGeom prst="rect">
+            <a:avLst/>
+          </a:prstGeom>
+          <a:noFill/>
+        </p:spPr>
+        <p:txBody>
+          <a:bodyPr wrap="none">
+            <a:spAutoFit/>
+          </a:bodyPr>
+          <a:lstStyle/>
+          <a:p>
+            <a:r>
+              <a:rPr sz="800">
+                <a:solidFill>
+                  <a:srgbClr val="000000"/>
+                </a:solidFill>
+              </a:rPr>
+              <a:t>Copyright © 2026 by Elephant Scale, All Rights Reserved</a:t>
+            </a:r>
+          </a:p>
+        </p:txBody>
+      </p:sp>
+    </p:spTree>
+  </p:cSld>
+  <p:clrMapOvr>
+    <a:masterClrMapping/>
+  </p:clrMapOvr>
+</p:sld>
+</file>
+
+<file path=ppt/slides/slide2.xml><?xml version="1.0" encoding="utf-8"?>
+<p:sld xmlns:a="http://schemas.openxmlformats.org/drawingml/2006/main" xmlns:r="http://schemas.openxmlformats.org/officeDocument/2006/relationships" xmlns:p="http://schemas.openxmlformats.org/presentationml/2006/main">
+  <p:cSld>
+    <p:spTree>
+      <p:nvGrpSpPr>
+        <p:cNvPr id="1" name=""/>
+        <p:cNvGrpSpPr/>
+        <p:nvPr/>
+      </p:nvGrpSpPr>
+      <p:grpSpPr>
+        <a:xfrm>
+          <a:off x="0" y="0"/>
+          <a:ext cx="0" cy="0"/>
+          <a:chOff x="0" y="0"/>
+          <a:chExt cx="0" cy="0"/>
+        </a:xfrm>
+      </p:grpSpPr>
+      <p:sp>
+        <p:nvSpPr>
+          <p:cNvPr id="2" name="Title 1"/>
+          <p:cNvSpPr>
+            <a:spLocks noGrp="1"/>
+          </p:cNvSpPr>
+          <p:nvPr>
+            <p:ph type="title"/>
+          </p:nvPr>
+        </p:nvSpPr>
+        <p:spPr/>
+        <p:txBody>
+          <a:bodyPr/>
+          <a:lstStyle/>
+          <a:p>
+            <a:r>
+              <a:t>Agenda</a:t>
+            </a:r>
+          </a:p>
+        </p:txBody>
+      </p:sp>
+      <p:sp>
+        <p:nvSpPr>
+          <p:cNvPr id="3" name="Content Placeholder 2"/>
+          <p:cNvSpPr>
+            <a:spLocks noGrp="1"/>
+          </p:cNvSpPr>
+          <p:nvPr>
+            <p:ph idx="1"/>
+          </p:nvPr>
+        </p:nvSpPr>
+        <p:spPr/>
+        <p:txBody>
+          <a:bodyPr/>
+          <a:lstStyle/>
+          <a:p>
+            <a:r>
+              <a:t> Connect architecture: workers, connectors, tasks, internal topics</a:t>
+            </a:r>
+          </a:p>
+          <a:p>
+            <a:r>
+              <a:t> Source and sink connectors; configuration</a:t>
+            </a:r>
+          </a:p>
+          <a:p>
+            <a:r>
+              <a:t> Offset management and exactly-once source connectors</a:t>
+            </a:r>
+          </a:p>
+          <a:p>
+            <a:r>
+              <a:t> Error handling, retries, and Dead Letter Queues</a:t>
+            </a:r>
+          </a:p>
+          <a:p>
+            <a:r>
+              <a:t> Integration patterns: databases (JDBC/CDC), object storage (S3), search</a:t>
+            </a:r>
+          </a:p>
+          <a:p>
+            <a:r>
+              <a:t> Hands-on: deploy source and sink connectors; trigger and inspect a DLQ</a:t>
+            </a:r>
+          </a:p>
+        </p:txBody>
+      </p:sp>
+      <p:sp>
+        <p:nvSpPr>
+          <p:cNvPr id="4" name="TextBox 3"/>
+          <p:cNvSpPr txBox="1"/>
+          <p:nvPr/>
+        </p:nvSpPr>
+        <p:spPr>
+          <a:xfrm>
+            <a:off x="704088" y="8065008"/>
+            <a:ext cx="8915400" cy="228600"/>
+          </a:xfrm>
+          <a:prstGeom prst="rect">
+            <a:avLst/>
+          </a:prstGeom>
+          <a:noFill/>
+        </p:spPr>
+        <p:txBody>
+          <a:bodyPr wrap="none">
+            <a:spAutoFit/>
+          </a:bodyPr>
+          <a:lstStyle/>
+          <a:p>
+            <a:r>
+              <a:rPr sz="800">
+                <a:solidFill>
+                  <a:srgbClr val="000000"/>
+                </a:solidFill>
+              </a:rPr>
+              <a:t>Copyright © 2026 by Elephant Scale, All Rights Reserved</a:t>
+            </a:r>
+          </a:p>
+        </p:txBody>
+      </p:sp>
+    </p:spTree>
+  </p:cSld>
+  <p:clrMapOvr>
+    <a:masterClrMapping/>
+  </p:clrMapOvr>
+</p:sld>
+</file>
+
+<file path=ppt/slides/slide3.xml><?xml version="1.0" encoding="utf-8"?>
+<p:sld xmlns:a="http://schemas.openxmlformats.org/drawingml/2006/main" xmlns:r="http://schemas.openxmlformats.org/officeDocument/2006/relationships" xmlns:p="http://schemas.openxmlformats.org/presentationml/2006/main">
+  <p:cSld>
+    <p:spTree>
+      <p:nvGrpSpPr>
+        <p:cNvPr id="1" name=""/>
+        <p:cNvGrpSpPr/>
+        <p:nvPr/>
+      </p:nvGrpSpPr>
+      <p:grpSpPr>
+        <a:xfrm>
+          <a:off x="0" y="0"/>
+          <a:ext cx="0" cy="0"/>
+          <a:chOff x="0" y="0"/>
+          <a:chExt cx="0" cy="0"/>
+        </a:xfrm>
+      </p:grpSpPr>
+      <p:sp>
+        <p:nvSpPr>
+          <p:cNvPr id="2" name="Title 1"/>
+          <p:cNvSpPr>
+            <a:spLocks noGrp="1"/>
+          </p:cNvSpPr>
+          <p:nvPr>
+            <p:ph type="title"/>
+          </p:nvPr>
+        </p:nvSpPr>
+        <p:spPr/>
+        <p:txBody>
+          <a:bodyPr/>
+          <a:lstStyle/>
+          <a:p>
+            <a:r>
+              <a:t>The Integration Problem</a:t>
+            </a:r>
+          </a:p>
+        </p:txBody>
+      </p:sp>
+      <p:sp>
+        <p:nvSpPr>
+          <p:cNvPr id="3" name="Content Placeholder 2"/>
+          <p:cNvSpPr>
+            <a:spLocks noGrp="1"/>
+          </p:cNvSpPr>
+          <p:nvPr>
+            <p:ph idx="1"/>
+          </p:nvPr>
+        </p:nvSpPr>
+        <p:spPr/>
+        <p:txBody>
+          <a:bodyPr/>
+          <a:lstStyle/>
+          <a:p>
+            <a:r>
+              <a:rPr dirty="0"/>
+              <a:t> Most Kafka data doesn't originate in Kafka — it lives in databases, and it needs to land in warehouses, search indexes, and object stores. Writing that plumbing by hand, over and over, is where projects bleed time.</a:t>
+            </a:r>
+          </a:p>
+          <a:p>
+            <a:endParaRPr lang="en-US" dirty="0"/>
+          </a:p>
+          <a:p>
+            <a:endParaRPr lang="en-US" dirty="0"/>
+          </a:p>
+          <a:p>
+            <a:endParaRPr dirty="0"/>
+          </a:p>
+          <a:p>
+            <a:r>
+              <a:rPr dirty="0"/>
+              <a:t> Every source and sink becomes a custom app: retries, offsets, scaling, monitoring — all DIY</a:t>
+            </a:r>
+          </a:p>
+          <a:p>
+            <a:r>
+              <a:rPr dirty="0"/>
+              <a:t> The same patterns get reimplemented on every team</a:t>
+            </a:r>
+          </a:p>
+          <a:p>
+            <a:r>
+              <a:rPr b="1" dirty="0"/>
+              <a:t> Kafka Connect</a:t>
+            </a:r>
+            <a:r>
+              <a:rPr dirty="0"/>
+              <a:t> turns that plumbing into</a:t>
+            </a:r>
+            <a:r>
+              <a:rPr b="1" dirty="0"/>
+              <a:t> configuration</a:t>
+            </a:r>
+          </a:p>
+        </p:txBody>
+      </p:sp>
+      <p:sp>
+        <p:nvSpPr>
+          <p:cNvPr id="4" name="TextBox 3"/>
+          <p:cNvSpPr txBox="1"/>
+          <p:nvPr/>
+        </p:nvSpPr>
+        <p:spPr>
+          <a:xfrm>
+            <a:off x="704088" y="8065008"/>
+            <a:ext cx="8915400" cy="228600"/>
+          </a:xfrm>
+          <a:prstGeom prst="rect">
+            <a:avLst/>
+          </a:prstGeom>
+          <a:noFill/>
+        </p:spPr>
+        <p:txBody>
+          <a:bodyPr wrap="none">
+            <a:spAutoFit/>
+          </a:bodyPr>
+          <a:lstStyle/>
+          <a:p>
+            <a:r>
+              <a:rPr sz="800">
+                <a:solidFill>
+                  <a:srgbClr val="000000"/>
+                </a:solidFill>
+              </a:rPr>
+              <a:t>Copyright © 2026 by Elephant Scale, All Rights Reserved</a:t>
+            </a:r>
+          </a:p>
+        </p:txBody>
+      </p:sp>
+      <p:pic>
+        <p:nvPicPr>
+          <p:cNvPr id="5" name="Picture 4" descr="1.png"/>
+          <p:cNvPicPr>
+            <a:picLocks noChangeAspect="1"/>
+          </p:cNvPicPr>
+          <p:nvPr/>
+        </p:nvPicPr>
+        <p:blipFill>
+          <a:blip r:embed="rId3"/>
+          <a:stretch>
+            <a:fillRect/>
+          </a:stretch>
+        </p:blipFill>
+        <p:spPr>
+          <a:xfrm>
+            <a:off x="228600" y="2777331"/>
+            <a:ext cx="8915400" cy="745946"/>
+          </a:xfrm>
+          <a:prstGeom prst="rect">
+            <a:avLst/>
+          </a:prstGeom>
+        </p:spPr>
+      </p:pic>
+    </p:spTree>
+  </p:cSld>
+  <p:clrMapOvr>
+    <a:masterClrMapping/>
+  </p:clrMapOvr>
+</p:sld>
+</file>
+
+<file path=ppt/slides/slide4.xml><?xml version="1.0" encoding="utf-8"?>
+<p:sld xmlns:a="http://schemas.openxmlformats.org/drawingml/2006/main" xmlns:r="http://schemas.openxmlformats.org/officeDocument/2006/relationships" xmlns:p="http://schemas.openxmlformats.org/presentationml/2006/main">
+  <p:cSld>
+    <p:spTree>
+      <p:nvGrpSpPr>
+        <p:cNvPr id="1" name=""/>
+        <p:cNvGrpSpPr/>
+        <p:nvPr/>
+      </p:nvGrpSpPr>
+      <p:grpSpPr>
+        <a:xfrm>
+          <a:off x="0" y="0"/>
+          <a:ext cx="0" cy="0"/>
+          <a:chOff x="0" y="0"/>
+          <a:chExt cx="0" cy="0"/>
+        </a:xfrm>
+      </p:grpSpPr>
+      <p:sp>
+        <p:nvSpPr>
+          <p:cNvPr id="2" name="Title 1"/>
+          <p:cNvSpPr>
+            <a:spLocks noGrp="1"/>
+          </p:cNvSpPr>
+          <p:nvPr>
+            <p:ph type="title"/>
+          </p:nvPr>
+        </p:nvSpPr>
+        <p:spPr/>
+        <p:txBody>
+          <a:bodyPr/>
+          <a:lstStyle/>
+          <a:p>
+            <a:r>
+              <a:t>What Kafka Connect Is</a:t>
+            </a:r>
+          </a:p>
+        </p:txBody>
+      </p:sp>
+      <p:sp>
+        <p:nvSpPr>
+          <p:cNvPr id="3" name="Content Placeholder 2"/>
+          <p:cNvSpPr>
+            <a:spLocks noGrp="1"/>
+          </p:cNvSpPr>
+          <p:nvPr>
+            <p:ph idx="1"/>
+          </p:nvPr>
+        </p:nvSpPr>
+        <p:spPr/>
+        <p:txBody>
+          <a:bodyPr/>
+          <a:lstStyle/>
+          <a:p>
+            <a:r>
+              <a:t> A</a:t>
+            </a:r>
+            <a:r>
+              <a:rPr b="1"/>
+              <a:t> framework and runtime</a:t>
+            </a:r>
+            <a:r>
+              <a:t> for streaming data between Kafka and external systems using ready-made, reusable</a:t>
+            </a:r>
+            <a:r>
+              <a:rPr b="1"/>
+              <a:t> connectors</a:t>
+            </a:r>
+            <a:r>
+              <a:t> — no client code.</a:t>
+            </a:r>
+          </a:p>
+          <a:p>
+            <a:r>
+              <a:rPr b="1"/>
+              <a:t> Source</a:t>
+            </a:r>
+            <a:r>
+              <a:t> connectors pull data</a:t>
+            </a:r>
+            <a:r>
+              <a:rPr b="1"/>
+              <a:t> into</a:t>
+            </a:r>
+            <a:r>
+              <a:t> Kafka (e.g. a database table → a topic)</a:t>
+            </a:r>
+          </a:p>
+          <a:p>
+            <a:r>
+              <a:rPr b="1"/>
+              <a:t> Sink</a:t>
+            </a:r>
+            <a:r>
+              <a:t> connectors push data</a:t>
+            </a:r>
+            <a:r>
+              <a:rPr b="1"/>
+              <a:t> out of</a:t>
+            </a:r>
+            <a:r>
+              <a:t> Kafka (e.g. a topic → S3)</a:t>
+            </a:r>
+          </a:p>
+          <a:p>
+            <a:r>
+              <a:t> You submit</a:t>
+            </a:r>
+            <a:r>
+              <a:rPr b="1"/>
+              <a:t> JSON configuration</a:t>
+            </a:r>
+            <a:r>
+              <a:t> to a REST API; Connect runs it</a:t>
+            </a:r>
+          </a:p>
+          <a:p>
+            <a:r>
+              <a:t> It handles scaling, offset tracking, retries, restarts, and error routing for you</a:t>
+            </a:r>
+          </a:p>
+          <a:p>
+            <a:endParaRPr/>
           </a:p>
         </p:txBody>
       </p:sp>
@@ -3380,8 +4352,8 @@
         </p:blipFill>
         <p:spPr>
           <a:xfrm>
-            <a:off x="0" y="3108960"/>
-            <a:ext cx="8915400" cy="923508"/>
+            <a:off x="0" y="5596731"/>
+            <a:ext cx="9372600" cy="639979"/>
           </a:xfrm>
           <a:prstGeom prst="rect">
             <a:avLst/>
@@ -3396,8 +4368,8 @@
 </p:sld>
 </file>
 
-<file path=ppt/slides/slide14.xml><?xml version="1.0" encoding="utf-8"?>
-<p:sld xmlns:a="http://schemas.openxmlformats.org/drawingml/2006/main" xmlns:p="http://schemas.openxmlformats.org/presentationml/2006/main" xmlns:r="http://schemas.openxmlformats.org/officeDocument/2006/relationships">
+<file path=ppt/slides/slide5.xml><?xml version="1.0" encoding="utf-8"?>
+<p:sld xmlns:a="http://schemas.openxmlformats.org/drawingml/2006/main" xmlns:r="http://schemas.openxmlformats.org/officeDocument/2006/relationships" xmlns:p="http://schemas.openxmlformats.org/presentationml/2006/main">
   <p:cSld>
     <p:spTree>
       <p:nvGrpSpPr>
@@ -3405,7 +4377,14 @@
         <p:cNvGrpSpPr/>
         <p:nvPr/>
       </p:nvGrpSpPr>
-      <p:grpSpPr/>
+      <p:grpSpPr>
+        <a:xfrm>
+          <a:off x="0" y="0"/>
+          <a:ext cx="0" cy="0"/>
+          <a:chOff x="0" y="0"/>
+          <a:chExt cx="0" cy="0"/>
+        </a:xfrm>
+      </p:grpSpPr>
       <p:sp>
         <p:nvSpPr>
           <p:cNvPr id="2" name="Title 1"/>
@@ -3422,7 +4401,7 @@
           <a:lstStyle/>
           <a:p>
             <a:r>
-              <a:t>Integration Patterns</a:t>
+              <a:t>Architecture: Workers, Connectors, Tasks</a:t>
             </a:r>
           </a:p>
         </p:txBody>
@@ -3443,63 +4422,74 @@
           <a:lstStyle/>
           <a:p>
             <a:r>
-              <a:t> Where Connect fits in a real architecture:</a:t>
+              <a:t> Four terms, one hierarchy:</a:t>
             </a:r>
           </a:p>
           <a:p>
             <a:r>
               <a:rPr b="1"/>
-              <a:t> Databases</a:t>
-            </a:r>
-            <a:r>
-              <a:t> — JDBC source/sink, or</a:t>
+              <a:t> Worker</a:t>
+            </a:r>
+            <a:r>
+              <a:t> — a Connect JVM process; a Connect</a:t>
             </a:r>
             <a:r>
               <a:rPr b="1"/>
-              <a:t> CDC</a:t>
-            </a:r>
-            <a:r>
-              <a:t> (Debezium) for full change capture</a:t>
+              <a:t> cluster</a:t>
+            </a:r>
+            <a:r>
+              <a:t> is one or more workers</a:t>
             </a:r>
           </a:p>
           <a:p>
             <a:r>
               <a:rPr b="1"/>
-              <a:t> Object storage</a:t>
-            </a:r>
-            <a:r>
-              <a:t> — S3/GCS/Azure sinks for a data lake or archival (our lab: MinIO)</a:t>
+              <a:t> Connector</a:t>
+            </a:r>
+            <a:r>
+              <a:t> — a configured integration (e.g. "the orders JDBC source"); it decides how to split the work</a:t>
             </a:r>
           </a:p>
           <a:p>
             <a:r>
               <a:rPr b="1"/>
-              <a:t> Search</a:t>
-            </a:r>
-            <a:r>
-              <a:t> — Elasticsearch/OpenSearch sinks for real-time indexing</a:t>
-            </a:r>
-          </a:p>
-          <a:p>
+              <a:t> Task</a:t>
+            </a:r>
+            <a:r>
+              <a:t> — the unit that actually moves data; a connector runs</a:t>
+            </a:r>
             <a:r>
               <a:rPr b="1"/>
-              <a:t> Warehouses</a:t>
-            </a:r>
-            <a:r>
-              <a:t> — sinks into Snowflake/BigQuery/Redshift for analytics</a:t>
-            </a:r>
-          </a:p>
-          <a:p>
+              <a:t> N tasks</a:t>
+            </a:r>
+            <a:r>
+              <a:t> in parallel</a:t>
+            </a:r>
+          </a:p>
+          <a:p>
+            <a:r>
+              <a:t> Tasks are</a:t>
+            </a:r>
             <a:r>
               <a:rPr b="1"/>
-              <a:t> When NOT to use Connect</a:t>
-            </a:r>
-            <a:r>
-              <a:t> — if you need rich per-record business logic, a real app or a</a:t>
-            </a:r>
-            <a:r>
-              <a:t> stream processor may fit better than a connector + SMTs</a:t>
-            </a:r>
+              <a:t> distributed</a:t>
+            </a:r>
+            <a:r>
+              <a:t> across workers and</a:t>
+            </a:r>
+            <a:r>
+              <a:rPr b="1"/>
+              <a:t> rebalanced</a:t>
+            </a:r>
+            <a:r>
+              <a:t> if a worker fails</a:t>
+            </a:r>
+          </a:p>
+          <a:p>
+            <a:endParaRPr/>
+          </a:p>
+          <a:p>
+            <a:endParaRPr/>
           </a:p>
         </p:txBody>
       </p:sp>
@@ -3536,6 +4526,30 @@
           </a:p>
         </p:txBody>
       </p:sp>
+      <p:pic>
+        <p:nvPicPr>
+          <p:cNvPr id="5" name="Picture 4" descr="1.png"/>
+          <p:cNvPicPr>
+            <a:picLocks noChangeAspect="1"/>
+          </p:cNvPicPr>
+          <p:nvPr/>
+        </p:nvPicPr>
+        <p:blipFill>
+          <a:blip r:embed="rId3"/>
+          <a:stretch>
+            <a:fillRect/>
+          </a:stretch>
+        </p:blipFill>
+        <p:spPr>
+          <a:xfrm>
+            <a:off x="-4763" y="5291931"/>
+            <a:ext cx="9218778" cy="1358900"/>
+          </a:xfrm>
+          <a:prstGeom prst="rect">
+            <a:avLst/>
+          </a:prstGeom>
+        </p:spPr>
+      </p:pic>
     </p:spTree>
   </p:cSld>
   <p:clrMapOvr>
@@ -3544,8 +4558,8 @@
 </p:sld>
 </file>
 
-<file path=ppt/slides/slide15.xml><?xml version="1.0" encoding="utf-8"?>
-<p:sld xmlns:a="http://schemas.openxmlformats.org/drawingml/2006/main" xmlns:p="http://schemas.openxmlformats.org/presentationml/2006/main" xmlns:r="http://schemas.openxmlformats.org/officeDocument/2006/relationships">
+<file path=ppt/slides/slide6.xml><?xml version="1.0" encoding="utf-8"?>
+<p:sld xmlns:a="http://schemas.openxmlformats.org/drawingml/2006/main" xmlns:r="http://schemas.openxmlformats.org/officeDocument/2006/relationships" xmlns:p="http://schemas.openxmlformats.org/presentationml/2006/main">
   <p:cSld>
     <p:spTree>
       <p:nvGrpSpPr>
@@ -3553,7 +4567,14 @@
         <p:cNvGrpSpPr/>
         <p:nvPr/>
       </p:nvGrpSpPr>
-      <p:grpSpPr/>
+      <p:grpSpPr>
+        <a:xfrm>
+          <a:off x="0" y="0"/>
+          <a:ext cx="0" cy="0"/>
+          <a:chOff x="0" y="0"/>
+          <a:chExt cx="0" cy="0"/>
+        </a:xfrm>
+      </p:grpSpPr>
       <p:sp>
         <p:nvSpPr>
           <p:cNvPr id="2" name="Title 1"/>
@@ -3570,7 +4591,7 @@
           <a:lstStyle/>
           <a:p>
             <a:r>
-              <a:t>Summary</a:t>
+              <a:t>Distributed Mode and Internal Topics</a:t>
             </a:r>
           </a:p>
         </p:txBody>
@@ -3591,114 +4612,97 @@
           <a:lstStyle/>
           <a:p>
             <a:r>
+              <a:t> Production Connect runs in</a:t>
+            </a:r>
+            <a:r>
               <a:rPr b="1"/>
-              <a:t> Kafka Connect</a:t>
-            </a:r>
-            <a:r>
-              <a:t> streams data in/out of Kafka as</a:t>
+              <a:t> distributed mode</a:t>
+            </a:r>
+            <a:r>
+              <a:t> , and — very Kafka — it stores its own state</a:t>
             </a:r>
             <a:r>
               <a:rPr b="1"/>
-              <a:t> configuration</a:t>
-            </a:r>
-            <a:r>
-              <a:t> , not custom apps</a:t>
-            </a:r>
-          </a:p>
-          <a:p>
+              <a:t> in Kafka topics</a:t>
+            </a:r>
+            <a:r>
+              <a:t> .</a:t>
+            </a:r>
+          </a:p>
+          <a:p>
+            <a:r>
+              <a:rPr>
+                <a:latin typeface="Courier New"/>
+              </a:rPr>
+              <a:t> connect-configs</a:t>
+            </a:r>
+            <a:r>
+              <a:t> — connector configurations</a:t>
+            </a:r>
+          </a:p>
+          <a:p>
+            <a:r>
+              <a:rPr>
+                <a:latin typeface="Courier New"/>
+              </a:rPr>
+              <a:t> connect-offsets</a:t>
+            </a:r>
+            <a:r>
+              <a:t> — source connector progress (where each source left off)</a:t>
+            </a:r>
+          </a:p>
+          <a:p>
+            <a:r>
+              <a:rPr>
+                <a:latin typeface="Courier New"/>
+              </a:rPr>
+              <a:t> connect-status</a:t>
+            </a:r>
+            <a:r>
+              <a:t> — connector/task status</a:t>
+            </a:r>
+          </a:p>
+          <a:p>
+            <a:r>
+              <a:t> Because state lives in Kafka:</a:t>
+            </a:r>
+          </a:p>
+          <a:p>
+            <a:r>
+              <a:t> Workers are</a:t>
+            </a:r>
             <a:r>
               <a:rPr b="1"/>
-              <a:t> Workers</a:t>
-            </a:r>
-            <a:r>
-              <a:t> run</a:t>
+              <a:t> stateless</a:t>
+            </a:r>
+            <a:r>
+              <a:t> — one can die and its tasks move to another with no data loss</a:t>
+            </a:r>
+          </a:p>
+          <a:p>
+            <a:r>
+              <a:t> You submit config once via REST; the cluster remembers it</a:t>
+            </a:r>
+          </a:p>
+          <a:p>
+            <a:r>
+              <a:t> Sink connectors track their position with normal</a:t>
             </a:r>
             <a:r>
               <a:rPr b="1"/>
-              <a:t> connectors</a:t>
-            </a:r>
-            <a:r>
-              <a:t> , which split work into parallel</a:t>
-            </a:r>
-            <a:r>
-              <a:rPr b="1"/>
-              <a:t> tasks</a:t>
-            </a:r>
-            <a:r>
-              <a:t> ; state lives in Kafka</a:t>
-            </a:r>
-            <a:r>
-              <a:t> topics, so workers are stateless and fault-tolerant</a:t>
-            </a:r>
-          </a:p>
-          <a:p>
-            <a:r>
-              <a:rPr b="1"/>
-              <a:t> Source</a:t>
-            </a:r>
-            <a:r>
-              <a:t> connectors pull in (JDBC poll vs.</a:t>
-            </a:r>
-            <a:r>
-              <a:rPr b="1"/>
-              <a:t> CDC</a:t>
-            </a:r>
-            <a:r>
-              <a:t> for deletes);</a:t>
-            </a:r>
-            <a:r>
-              <a:rPr b="1"/>
-              <a:t> sink</a:t>
-            </a:r>
-            <a:r>
-              <a:t> connectors push out</a:t>
-            </a:r>
-            <a:r>
-              <a:t> (a consumer group under the hood)</a:t>
-            </a:r>
-          </a:p>
-          <a:p>
-            <a:r>
-              <a:rPr b="1"/>
-              <a:t> Exactly-once</a:t>
-            </a:r>
-            <a:r>
-              <a:t> is built into sources; sink exactly-once needs an</a:t>
-            </a:r>
-            <a:r>
-              <a:rPr b="1"/>
-              <a:t> idempotent</a:t>
-            </a:r>
-            <a:r>
-              <a:t> destination</a:t>
-            </a:r>
-          </a:p>
-          <a:p>
-            <a:r>
-              <a:rPr b="1"/>
-              <a:t> DLQs</a:t>
-            </a:r>
-            <a:r>
-              <a:t> keep pipelines running past bad records;</a:t>
-            </a:r>
-            <a:r>
-              <a:rPr b="1"/>
-              <a:t> SMTs</a:t>
-            </a:r>
-            <a:r>
-              <a:t> do lightweight per-record shaping</a:t>
-            </a:r>
-          </a:p>
-          <a:p>
-            <a:r>
-              <a:t> Connect is the</a:t>
-            </a:r>
-            <a:r>
-              <a:rPr b="1"/>
-              <a:t> integration spine</a:t>
-            </a:r>
-            <a:r>
-              <a:t> for databases, object storage, search, and warehouses</a:t>
+              <a:t> consumer offsets</a:t>
+            </a:r>
+            <a:r>
+              <a:t> (</a:t>
+            </a:r>
+            <a:r>
+              <a:rPr>
+                <a:latin typeface="Courier New"/>
+              </a:rPr>
+              <a:t> __consumer_offsets</a:t>
+            </a:r>
+            <a:r>
+              <a:t> )</a:t>
             </a:r>
           </a:p>
         </p:txBody>
@@ -3744,8 +4748,8 @@
 </p:sld>
 </file>
 
-<file path=ppt/slides/slide2.xml><?xml version="1.0" encoding="utf-8"?>
-<p:sld xmlns:a="http://schemas.openxmlformats.org/drawingml/2006/main" xmlns:p="http://schemas.openxmlformats.org/presentationml/2006/main" xmlns:r="http://schemas.openxmlformats.org/officeDocument/2006/relationships">
+<file path=ppt/slides/slide7.xml><?xml version="1.0" encoding="utf-8"?>
+<p:sld xmlns:a="http://schemas.openxmlformats.org/drawingml/2006/main" xmlns:r="http://schemas.openxmlformats.org/officeDocument/2006/relationships" xmlns:p="http://schemas.openxmlformats.org/presentationml/2006/main">
   <p:cSld>
     <p:spTree>
       <p:nvGrpSpPr>
@@ -3753,7 +4757,14 @@
         <p:cNvGrpSpPr/>
         <p:nvPr/>
       </p:nvGrpSpPr>
-      <p:grpSpPr/>
+      <p:grpSpPr>
+        <a:xfrm>
+          <a:off x="0" y="0"/>
+          <a:ext cx="0" cy="0"/>
+          <a:chOff x="0" y="0"/>
+          <a:chExt cx="0" cy="0"/>
+        </a:xfrm>
+      </p:grpSpPr>
       <p:sp>
         <p:nvSpPr>
           <p:cNvPr id="2" name="Title 1"/>
@@ -3770,7 +4781,7 @@
           <a:lstStyle/>
           <a:p>
             <a:r>
-              <a:t>Agenda</a:t>
+              <a:t>Configuring a Connector</a:t>
             </a:r>
           </a:p>
         </p:txBody>
@@ -3791,156 +4802,74 @@
           <a:lstStyle/>
           <a:p>
             <a:r>
-              <a:t> Connect architecture: workers, connectors, tasks, internal topics</a:t>
-            </a:r>
-          </a:p>
-          <a:p>
-            <a:r>
-              <a:t> Source and sink connectors; configuration</a:t>
-            </a:r>
-          </a:p>
-          <a:p>
-            <a:r>
-              <a:t> Offset management and exactly-once source connectors</a:t>
-            </a:r>
-          </a:p>
-          <a:p>
-            <a:r>
-              <a:t> Error handling, retries, and Dead Letter Queues</a:t>
-            </a:r>
-          </a:p>
-          <a:p>
-            <a:r>
-              <a:t> Integration patterns: databases (JDBC/CDC), object storage (S3), search</a:t>
-            </a:r>
-          </a:p>
-          <a:p>
-            <a:r>
-              <a:t> Hands-on: deploy source and sink connectors; trigger and inspect a DLQ</a:t>
-            </a:r>
-          </a:p>
-        </p:txBody>
-      </p:sp>
-      <p:sp>
-        <p:nvSpPr>
-          <p:cNvPr id="4" name="TextBox 3"/>
-          <p:cNvSpPr txBox="1"/>
-          <p:nvPr/>
-        </p:nvSpPr>
-        <p:spPr>
-          <a:xfrm>
-            <a:off x="704088" y="8065008"/>
-            <a:ext cx="8915400" cy="228600"/>
-          </a:xfrm>
-          <a:prstGeom prst="rect">
-            <a:avLst/>
-          </a:prstGeom>
-          <a:noFill/>
-        </p:spPr>
-        <p:txBody>
-          <a:bodyPr wrap="none">
-            <a:spAutoFit/>
-          </a:bodyPr>
-          <a:lstStyle/>
-          <a:p>
-            <a:r>
-              <a:rPr sz="800">
-                <a:solidFill>
-                  <a:srgbClr val="000000"/>
-                </a:solidFill>
+              <a:rPr dirty="0"/>
+              <a:t> A connector is just JSON, </a:t>
+            </a:r>
+            <a:r>
+              <a:rPr dirty="0" err="1"/>
+              <a:t>POSTed</a:t>
+            </a:r>
+            <a:r>
+              <a:rPr dirty="0"/>
+              <a:t> to the Connect REST API (</a:t>
+            </a:r>
+            <a:r>
+              <a:rPr dirty="0">
+                <a:latin typeface="Courier New"/>
               </a:rPr>
-              <a:t>Copyright © 2026 by Elephant Scale, All Rights Reserved</a:t>
-            </a:r>
-          </a:p>
-        </p:txBody>
-      </p:sp>
-    </p:spTree>
-  </p:cSld>
-  <p:clrMapOvr>
-    <a:masterClrMapping/>
-  </p:clrMapOvr>
-</p:sld>
-</file>
-
-<file path=ppt/slides/slide3.xml><?xml version="1.0" encoding="utf-8"?>
-<p:sld xmlns:a="http://schemas.openxmlformats.org/drawingml/2006/main" xmlns:p="http://schemas.openxmlformats.org/presentationml/2006/main" xmlns:r="http://schemas.openxmlformats.org/officeDocument/2006/relationships">
-  <p:cSld>
-    <p:spTree>
-      <p:nvGrpSpPr>
-        <p:cNvPr id="1" name=""/>
-        <p:cNvGrpSpPr/>
-        <p:nvPr/>
-      </p:nvGrpSpPr>
-      <p:grpSpPr/>
-      <p:sp>
-        <p:nvSpPr>
-          <p:cNvPr id="2" name="Title 1"/>
-          <p:cNvSpPr>
-            <a:spLocks noGrp="1"/>
-          </p:cNvSpPr>
-          <p:nvPr>
-            <p:ph type="title"/>
-          </p:nvPr>
-        </p:nvSpPr>
-        <p:spPr/>
-        <p:txBody>
-          <a:bodyPr/>
-          <a:lstStyle/>
-          <a:p>
-            <a:r>
-              <a:t>The Integration Problem</a:t>
-            </a:r>
-          </a:p>
-        </p:txBody>
-      </p:sp>
-      <p:sp>
-        <p:nvSpPr>
-          <p:cNvPr id="3" name="Content Placeholder 2"/>
-          <p:cNvSpPr>
-            <a:spLocks noGrp="1"/>
-          </p:cNvSpPr>
-          <p:nvPr>
-            <p:ph idx="1"/>
-          </p:nvPr>
-        </p:nvSpPr>
-        <p:spPr/>
-        <p:txBody>
-          <a:bodyPr/>
-          <a:lstStyle/>
-          <a:p>
-            <a:r>
-              <a:t> Most Kafka data doesn't originate in Kafka — it lives in databases, and it needs to land in</a:t>
-            </a:r>
-            <a:r>
-              <a:t> warehouses, search indexes, and object stores. Writing that plumbing by hand, over and over,</a:t>
-            </a:r>
-            <a:r>
-              <a:t> is where projects bleed time.</a:t>
-            </a:r>
-          </a:p>
-          <a:p/>
-          <a:p/>
-          <a:p>
-            <a:r>
-              <a:t> Every source and sink becomes a custom app: retries, offsets, scaling, monitoring — all DIY</a:t>
-            </a:r>
-          </a:p>
-          <a:p>
-            <a:r>
-              <a:t> The same patterns get reimplemented on every team</a:t>
-            </a:r>
-          </a:p>
-          <a:p>
-            <a:r>
-              <a:rPr b="1"/>
-              <a:t> Kafka Connect</a:t>
-            </a:r>
-            <a:r>
-              <a:t> turns that plumbing into</a:t>
-            </a:r>
-            <a:r>
-              <a:rPr b="1"/>
-              <a:t> configuration</a:t>
+              <a:t> :8083</a:t>
+            </a:r>
+            <a:r>
+              <a:rPr dirty="0"/>
+              <a:t> ).</a:t>
+            </a:r>
+          </a:p>
+          <a:p>
+            <a:endParaRPr dirty="0"/>
+          </a:p>
+          <a:p>
+            <a:endParaRPr dirty="0"/>
+          </a:p>
+          <a:p>
+            <a:endParaRPr dirty="0"/>
+          </a:p>
+          <a:p>
+            <a:endParaRPr dirty="0"/>
+          </a:p>
+          <a:p>
+            <a:endParaRPr lang="en-US" dirty="0"/>
+          </a:p>
+          <a:p>
+            <a:endParaRPr lang="en-US" dirty="0"/>
+          </a:p>
+          <a:p>
+            <a:endParaRPr dirty="0"/>
+          </a:p>
+          <a:p>
+            <a:endParaRPr dirty="0"/>
+          </a:p>
+          <a:p>
+            <a:r>
+              <a:rPr dirty="0">
+                <a:latin typeface="Courier New"/>
+              </a:rPr>
+              <a:t> </a:t>
+            </a:r>
+            <a:r>
+              <a:rPr dirty="0" err="1">
+                <a:latin typeface="Courier New"/>
+              </a:rPr>
+              <a:t>connector.class</a:t>
+            </a:r>
+            <a:r>
+              <a:rPr dirty="0"/>
+              <a:t> selects the plugin; the rest is that plugin's configuration</a:t>
+            </a:r>
+          </a:p>
+          <a:p>
+            <a:r>
+              <a:rPr dirty="0"/>
+              <a:t> Manage the lifecycle over REST: list, status, pause, resume, restart, delete</a:t>
             </a:r>
           </a:p>
         </p:txBody>
@@ -3994,705 +4923,8 @@
         </p:blipFill>
         <p:spPr>
           <a:xfrm>
-            <a:off x="0" y="2231136"/>
-            <a:ext cx="8915400" cy="745946"/>
-          </a:xfrm>
-          <a:prstGeom prst="rect">
-            <a:avLst/>
-          </a:prstGeom>
-        </p:spPr>
-      </p:pic>
-    </p:spTree>
-  </p:cSld>
-  <p:clrMapOvr>
-    <a:masterClrMapping/>
-  </p:clrMapOvr>
-</p:sld>
-</file>
-
-<file path=ppt/slides/slide4.xml><?xml version="1.0" encoding="utf-8"?>
-<p:sld xmlns:a="http://schemas.openxmlformats.org/drawingml/2006/main" xmlns:p="http://schemas.openxmlformats.org/presentationml/2006/main" xmlns:r="http://schemas.openxmlformats.org/officeDocument/2006/relationships">
-  <p:cSld>
-    <p:spTree>
-      <p:nvGrpSpPr>
-        <p:cNvPr id="1" name=""/>
-        <p:cNvGrpSpPr/>
-        <p:nvPr/>
-      </p:nvGrpSpPr>
-      <p:grpSpPr/>
-      <p:sp>
-        <p:nvSpPr>
-          <p:cNvPr id="2" name="Title 1"/>
-          <p:cNvSpPr>
-            <a:spLocks noGrp="1"/>
-          </p:cNvSpPr>
-          <p:nvPr>
-            <p:ph type="title"/>
-          </p:nvPr>
-        </p:nvSpPr>
-        <p:spPr/>
-        <p:txBody>
-          <a:bodyPr/>
-          <a:lstStyle/>
-          <a:p>
-            <a:r>
-              <a:t>What Kafka Connect Is</a:t>
-            </a:r>
-          </a:p>
-        </p:txBody>
-      </p:sp>
-      <p:sp>
-        <p:nvSpPr>
-          <p:cNvPr id="3" name="Content Placeholder 2"/>
-          <p:cNvSpPr>
-            <a:spLocks noGrp="1"/>
-          </p:cNvSpPr>
-          <p:nvPr>
-            <p:ph idx="1"/>
-          </p:nvPr>
-        </p:nvSpPr>
-        <p:spPr/>
-        <p:txBody>
-          <a:bodyPr/>
-          <a:lstStyle/>
-          <a:p>
-            <a:r>
-              <a:t> A</a:t>
-            </a:r>
-            <a:r>
-              <a:rPr b="1"/>
-              <a:t> framework and runtime</a:t>
-            </a:r>
-            <a:r>
-              <a:t> for streaming data between Kafka and external systems using</a:t>
-            </a:r>
-            <a:r>
-              <a:t> ready-made, reusable</a:t>
-            </a:r>
-            <a:r>
-              <a:rPr b="1"/>
-              <a:t> connectors</a:t>
-            </a:r>
-            <a:r>
-              <a:t> — no client code.</a:t>
-            </a:r>
-          </a:p>
-          <a:p>
-            <a:r>
-              <a:rPr b="1"/>
-              <a:t> Source</a:t>
-            </a:r>
-            <a:r>
-              <a:t> connectors pull data</a:t>
-            </a:r>
-            <a:r>
-              <a:rPr b="1"/>
-              <a:t> into</a:t>
-            </a:r>
-            <a:r>
-              <a:t> Kafka (e.g. a database table → a topic)</a:t>
-            </a:r>
-          </a:p>
-          <a:p>
-            <a:r>
-              <a:rPr b="1"/>
-              <a:t> Sink</a:t>
-            </a:r>
-            <a:r>
-              <a:t> connectors push data</a:t>
-            </a:r>
-            <a:r>
-              <a:rPr b="1"/>
-              <a:t> out of</a:t>
-            </a:r>
-            <a:r>
-              <a:t> Kafka (e.g. a topic → S3)</a:t>
-            </a:r>
-          </a:p>
-          <a:p>
-            <a:r>
-              <a:t> You submit</a:t>
-            </a:r>
-            <a:r>
-              <a:rPr b="1"/>
-              <a:t> JSON configuration</a:t>
-            </a:r>
-            <a:r>
-              <a:t> to a REST API; Connect runs it</a:t>
-            </a:r>
-          </a:p>
-          <a:p>
-            <a:r>
-              <a:t> It handles scaling, offset tracking, retries, restarts, and error routing for you</a:t>
-            </a:r>
-          </a:p>
-          <a:p/>
-        </p:txBody>
-      </p:sp>
-      <p:sp>
-        <p:nvSpPr>
-          <p:cNvPr id="4" name="TextBox 3"/>
-          <p:cNvSpPr txBox="1"/>
-          <p:nvPr/>
-        </p:nvSpPr>
-        <p:spPr>
-          <a:xfrm>
-            <a:off x="704088" y="8065008"/>
-            <a:ext cx="8915400" cy="228600"/>
-          </a:xfrm>
-          <a:prstGeom prst="rect">
-            <a:avLst/>
-          </a:prstGeom>
-          <a:noFill/>
-        </p:spPr>
-        <p:txBody>
-          <a:bodyPr wrap="none">
-            <a:spAutoFit/>
-          </a:bodyPr>
-          <a:lstStyle/>
-          <a:p>
-            <a:r>
-              <a:rPr sz="800">
-                <a:solidFill>
-                  <a:srgbClr val="000000"/>
-                </a:solidFill>
-              </a:rPr>
-              <a:t>Copyright © 2026 by Elephant Scale, All Rights Reserved</a:t>
-            </a:r>
-          </a:p>
-        </p:txBody>
-      </p:sp>
-      <p:pic>
-        <p:nvPicPr>
-          <p:cNvPr id="5" name="Picture 4" descr="1.png"/>
-          <p:cNvPicPr>
-            <a:picLocks noChangeAspect="1"/>
-          </p:cNvPicPr>
-          <p:nvPr/>
-        </p:nvPicPr>
-        <p:blipFill>
-          <a:blip r:embed="rId2"/>
-          <a:stretch>
-            <a:fillRect/>
-          </a:stretch>
-        </p:blipFill>
-        <p:spPr>
-          <a:xfrm>
-            <a:off x="0" y="3986783"/>
-            <a:ext cx="11531600" cy="787400"/>
-          </a:xfrm>
-          <a:prstGeom prst="rect">
-            <a:avLst/>
-          </a:prstGeom>
-        </p:spPr>
-      </p:pic>
-    </p:spTree>
-  </p:cSld>
-  <p:clrMapOvr>
-    <a:masterClrMapping/>
-  </p:clrMapOvr>
-</p:sld>
-</file>
-
-<file path=ppt/slides/slide5.xml><?xml version="1.0" encoding="utf-8"?>
-<p:sld xmlns:a="http://schemas.openxmlformats.org/drawingml/2006/main" xmlns:p="http://schemas.openxmlformats.org/presentationml/2006/main" xmlns:r="http://schemas.openxmlformats.org/officeDocument/2006/relationships">
-  <p:cSld>
-    <p:spTree>
-      <p:nvGrpSpPr>
-        <p:cNvPr id="1" name=""/>
-        <p:cNvGrpSpPr/>
-        <p:nvPr/>
-      </p:nvGrpSpPr>
-      <p:grpSpPr/>
-      <p:sp>
-        <p:nvSpPr>
-          <p:cNvPr id="2" name="Title 1"/>
-          <p:cNvSpPr>
-            <a:spLocks noGrp="1"/>
-          </p:cNvSpPr>
-          <p:nvPr>
-            <p:ph type="title"/>
-          </p:nvPr>
-        </p:nvSpPr>
-        <p:spPr/>
-        <p:txBody>
-          <a:bodyPr/>
-          <a:lstStyle/>
-          <a:p>
-            <a:r>
-              <a:t>Architecture: Workers, Connectors, Tasks</a:t>
-            </a:r>
-          </a:p>
-        </p:txBody>
-      </p:sp>
-      <p:sp>
-        <p:nvSpPr>
-          <p:cNvPr id="3" name="Content Placeholder 2"/>
-          <p:cNvSpPr>
-            <a:spLocks noGrp="1"/>
-          </p:cNvSpPr>
-          <p:nvPr>
-            <p:ph idx="1"/>
-          </p:nvPr>
-        </p:nvSpPr>
-        <p:spPr/>
-        <p:txBody>
-          <a:bodyPr/>
-          <a:lstStyle/>
-          <a:p>
-            <a:r>
-              <a:t> Four terms, one hierarchy:</a:t>
-            </a:r>
-          </a:p>
-          <a:p>
-            <a:r>
-              <a:rPr b="1"/>
-              <a:t> Worker</a:t>
-            </a:r>
-            <a:r>
-              <a:t> — a Connect JVM process; a Connect</a:t>
-            </a:r>
-            <a:r>
-              <a:rPr b="1"/>
-              <a:t> cluster</a:t>
-            </a:r>
-            <a:r>
-              <a:t> is one or more workers</a:t>
-            </a:r>
-          </a:p>
-          <a:p>
-            <a:r>
-              <a:rPr b="1"/>
-              <a:t> Connector</a:t>
-            </a:r>
-            <a:r>
-              <a:t> — a configured integration (e.g. "the orders JDBC source"); it decides how to</a:t>
-            </a:r>
-            <a:r>
-              <a:t> split the work</a:t>
-            </a:r>
-          </a:p>
-          <a:p>
-            <a:r>
-              <a:rPr b="1"/>
-              <a:t> Task</a:t>
-            </a:r>
-            <a:r>
-              <a:t> — the unit that actually moves data; a connector runs</a:t>
-            </a:r>
-            <a:r>
-              <a:rPr b="1"/>
-              <a:t> N tasks</a:t>
-            </a:r>
-            <a:r>
-              <a:t> in parallel</a:t>
-            </a:r>
-          </a:p>
-          <a:p>
-            <a:r>
-              <a:t> Tasks are</a:t>
-            </a:r>
-            <a:r>
-              <a:rPr b="1"/>
-              <a:t> distributed</a:t>
-            </a:r>
-            <a:r>
-              <a:t> across workers and</a:t>
-            </a:r>
-            <a:r>
-              <a:rPr b="1"/>
-              <a:t> rebalanced</a:t>
-            </a:r>
-            <a:r>
-              <a:t> if a worker fails</a:t>
-            </a:r>
-          </a:p>
-          <a:p/>
-          <a:p/>
-        </p:txBody>
-      </p:sp>
-      <p:sp>
-        <p:nvSpPr>
-          <p:cNvPr id="4" name="TextBox 3"/>
-          <p:cNvSpPr txBox="1"/>
-          <p:nvPr/>
-        </p:nvSpPr>
-        <p:spPr>
-          <a:xfrm>
-            <a:off x="704088" y="8065008"/>
-            <a:ext cx="8915400" cy="228600"/>
-          </a:xfrm>
-          <a:prstGeom prst="rect">
-            <a:avLst/>
-          </a:prstGeom>
-          <a:noFill/>
-        </p:spPr>
-        <p:txBody>
-          <a:bodyPr wrap="none">
-            <a:spAutoFit/>
-          </a:bodyPr>
-          <a:lstStyle/>
-          <a:p>
-            <a:r>
-              <a:rPr sz="800">
-                <a:solidFill>
-                  <a:srgbClr val="000000"/>
-                </a:solidFill>
-              </a:rPr>
-              <a:t>Copyright © 2026 by Elephant Scale, All Rights Reserved</a:t>
-            </a:r>
-          </a:p>
-        </p:txBody>
-      </p:sp>
-      <p:pic>
-        <p:nvPicPr>
-          <p:cNvPr id="5" name="Picture 4" descr="1.png"/>
-          <p:cNvPicPr>
-            <a:picLocks noChangeAspect="1"/>
-          </p:cNvPicPr>
-          <p:nvPr/>
-        </p:nvPicPr>
-        <p:blipFill>
-          <a:blip r:embed="rId2"/>
-          <a:stretch>
-            <a:fillRect/>
-          </a:stretch>
-        </p:blipFill>
-        <p:spPr>
-          <a:xfrm>
-            <a:off x="0" y="3547872"/>
-            <a:ext cx="10769600" cy="1587500"/>
-          </a:xfrm>
-          <a:prstGeom prst="rect">
-            <a:avLst/>
-          </a:prstGeom>
-        </p:spPr>
-      </p:pic>
-    </p:spTree>
-  </p:cSld>
-  <p:clrMapOvr>
-    <a:masterClrMapping/>
-  </p:clrMapOvr>
-</p:sld>
-</file>
-
-<file path=ppt/slides/slide6.xml><?xml version="1.0" encoding="utf-8"?>
-<p:sld xmlns:a="http://schemas.openxmlformats.org/drawingml/2006/main" xmlns:p="http://schemas.openxmlformats.org/presentationml/2006/main" xmlns:r="http://schemas.openxmlformats.org/officeDocument/2006/relationships">
-  <p:cSld>
-    <p:spTree>
-      <p:nvGrpSpPr>
-        <p:cNvPr id="1" name=""/>
-        <p:cNvGrpSpPr/>
-        <p:nvPr/>
-      </p:nvGrpSpPr>
-      <p:grpSpPr/>
-      <p:sp>
-        <p:nvSpPr>
-          <p:cNvPr id="2" name="Title 1"/>
-          <p:cNvSpPr>
-            <a:spLocks noGrp="1"/>
-          </p:cNvSpPr>
-          <p:nvPr>
-            <p:ph type="title"/>
-          </p:nvPr>
-        </p:nvSpPr>
-        <p:spPr/>
-        <p:txBody>
-          <a:bodyPr/>
-          <a:lstStyle/>
-          <a:p>
-            <a:r>
-              <a:t>Distributed Mode and Internal Topics</a:t>
-            </a:r>
-          </a:p>
-        </p:txBody>
-      </p:sp>
-      <p:sp>
-        <p:nvSpPr>
-          <p:cNvPr id="3" name="Content Placeholder 2"/>
-          <p:cNvSpPr>
-            <a:spLocks noGrp="1"/>
-          </p:cNvSpPr>
-          <p:nvPr>
-            <p:ph idx="1"/>
-          </p:nvPr>
-        </p:nvSpPr>
-        <p:spPr/>
-        <p:txBody>
-          <a:bodyPr/>
-          <a:lstStyle/>
-          <a:p>
-            <a:r>
-              <a:t> Production Connect runs in</a:t>
-            </a:r>
-            <a:r>
-              <a:rPr b="1"/>
-              <a:t> distributed mode</a:t>
-            </a:r>
-            <a:r>
-              <a:t> , and — very Kafka — it stores its own state</a:t>
-            </a:r>
-            <a:r>
-              <a:rPr b="1"/>
-              <a:t> in Kafka topics</a:t>
-            </a:r>
-            <a:r>
-              <a:t> .</a:t>
-            </a:r>
-          </a:p>
-          <a:p>
-            <a:r>
-              <a:rPr>
-                <a:latin typeface="Courier New"/>
-              </a:rPr>
-              <a:t> connect-configs</a:t>
-            </a:r>
-            <a:r>
-              <a:t> — connector configurations</a:t>
-            </a:r>
-          </a:p>
-          <a:p>
-            <a:r>
-              <a:rPr>
-                <a:latin typeface="Courier New"/>
-              </a:rPr>
-              <a:t> connect-offsets</a:t>
-            </a:r>
-            <a:r>
-              <a:t> — source connector progress (where each source left off)</a:t>
-            </a:r>
-          </a:p>
-          <a:p>
-            <a:r>
-              <a:rPr>
-                <a:latin typeface="Courier New"/>
-              </a:rPr>
-              <a:t> connect-status</a:t>
-            </a:r>
-            <a:r>
-              <a:t> — connector/task status</a:t>
-            </a:r>
-          </a:p>
-          <a:p>
-            <a:r>
-              <a:t> Because state lives in Kafka:</a:t>
-            </a:r>
-          </a:p>
-          <a:p>
-            <a:r>
-              <a:t> Workers are</a:t>
-            </a:r>
-            <a:r>
-              <a:rPr b="1"/>
-              <a:t> stateless</a:t>
-            </a:r>
-            <a:r>
-              <a:t> — one can die and its tasks move to another with no data loss</a:t>
-            </a:r>
-          </a:p>
-          <a:p>
-            <a:r>
-              <a:t> You submit config once via REST; the cluster remembers it</a:t>
-            </a:r>
-          </a:p>
-          <a:p>
-            <a:r>
-              <a:t> Sink connectors track their position with normal</a:t>
-            </a:r>
-            <a:r>
-              <a:rPr b="1"/>
-              <a:t> consumer offsets</a:t>
-            </a:r>
-            <a:r>
-              <a:t> (</a:t>
-            </a:r>
-            <a:r>
-              <a:rPr>
-                <a:latin typeface="Courier New"/>
-              </a:rPr>
-              <a:t> __consumer_offsets</a:t>
-            </a:r>
-            <a:r>
-              <a:t> )</a:t>
-            </a:r>
-          </a:p>
-        </p:txBody>
-      </p:sp>
-      <p:sp>
-        <p:nvSpPr>
-          <p:cNvPr id="4" name="TextBox 3"/>
-          <p:cNvSpPr txBox="1"/>
-          <p:nvPr/>
-        </p:nvSpPr>
-        <p:spPr>
-          <a:xfrm>
-            <a:off x="704088" y="8065008"/>
-            <a:ext cx="8915400" cy="228600"/>
-          </a:xfrm>
-          <a:prstGeom prst="rect">
-            <a:avLst/>
-          </a:prstGeom>
-          <a:noFill/>
-        </p:spPr>
-        <p:txBody>
-          <a:bodyPr wrap="none">
-            <a:spAutoFit/>
-          </a:bodyPr>
-          <a:lstStyle/>
-          <a:p>
-            <a:r>
-              <a:rPr sz="800">
-                <a:solidFill>
-                  <a:srgbClr val="000000"/>
-                </a:solidFill>
-              </a:rPr>
-              <a:t>Copyright © 2026 by Elephant Scale, All Rights Reserved</a:t>
-            </a:r>
-          </a:p>
-        </p:txBody>
-      </p:sp>
-    </p:spTree>
-  </p:cSld>
-  <p:clrMapOvr>
-    <a:masterClrMapping/>
-  </p:clrMapOvr>
-</p:sld>
-</file>
-
-<file path=ppt/slides/slide7.xml><?xml version="1.0" encoding="utf-8"?>
-<p:sld xmlns:a="http://schemas.openxmlformats.org/drawingml/2006/main" xmlns:p="http://schemas.openxmlformats.org/presentationml/2006/main" xmlns:r="http://schemas.openxmlformats.org/officeDocument/2006/relationships">
-  <p:cSld>
-    <p:spTree>
-      <p:nvGrpSpPr>
-        <p:cNvPr id="1" name=""/>
-        <p:cNvGrpSpPr/>
-        <p:nvPr/>
-      </p:nvGrpSpPr>
-      <p:grpSpPr/>
-      <p:sp>
-        <p:nvSpPr>
-          <p:cNvPr id="2" name="Title 1"/>
-          <p:cNvSpPr>
-            <a:spLocks noGrp="1"/>
-          </p:cNvSpPr>
-          <p:nvPr>
-            <p:ph type="title"/>
-          </p:nvPr>
-        </p:nvSpPr>
-        <p:spPr/>
-        <p:txBody>
-          <a:bodyPr/>
-          <a:lstStyle/>
-          <a:p>
-            <a:r>
-              <a:t>Configuring a Connector</a:t>
-            </a:r>
-          </a:p>
-        </p:txBody>
-      </p:sp>
-      <p:sp>
-        <p:nvSpPr>
-          <p:cNvPr id="3" name="Content Placeholder 2"/>
-          <p:cNvSpPr>
-            <a:spLocks noGrp="1"/>
-          </p:cNvSpPr>
-          <p:nvPr>
-            <p:ph idx="1"/>
-          </p:nvPr>
-        </p:nvSpPr>
-        <p:spPr/>
-        <p:txBody>
-          <a:bodyPr/>
-          <a:lstStyle/>
-          <a:p>
-            <a:r>
-              <a:t> A connector is just JSON, POSTed to the Connect REST API (</a:t>
-            </a:r>
-            <a:r>
-              <a:rPr>
-                <a:latin typeface="Courier New"/>
-              </a:rPr>
-              <a:t> :8083</a:t>
-            </a:r>
-            <a:r>
-              <a:t> ).</a:t>
-            </a:r>
-          </a:p>
-          <a:p/>
-          <a:p/>
-          <a:p/>
-          <a:p/>
-          <a:p/>
-          <a:p/>
-          <a:p>
-            <a:r>
-              <a:rPr>
-                <a:latin typeface="Courier New"/>
-              </a:rPr>
-              <a:t> connector.class</a:t>
-            </a:r>
-            <a:r>
-              <a:t> selects the plugin; the rest is that plugin's configuration</a:t>
-            </a:r>
-          </a:p>
-          <a:p>
-            <a:r>
-              <a:t> Manage the lifecycle over REST: list, status, pause, resume, restart, delete</a:t>
-            </a:r>
-          </a:p>
-        </p:txBody>
-      </p:sp>
-      <p:sp>
-        <p:nvSpPr>
-          <p:cNvPr id="4" name="TextBox 3"/>
-          <p:cNvSpPr txBox="1"/>
-          <p:nvPr/>
-        </p:nvSpPr>
-        <p:spPr>
-          <a:xfrm>
-            <a:off x="704088" y="8065008"/>
-            <a:ext cx="8915400" cy="228600"/>
-          </a:xfrm>
-          <a:prstGeom prst="rect">
-            <a:avLst/>
-          </a:prstGeom>
-          <a:noFill/>
-        </p:spPr>
-        <p:txBody>
-          <a:bodyPr wrap="none">
-            <a:spAutoFit/>
-          </a:bodyPr>
-          <a:lstStyle/>
-          <a:p>
-            <a:r>
-              <a:rPr sz="800">
-                <a:solidFill>
-                  <a:srgbClr val="000000"/>
-                </a:solidFill>
-              </a:rPr>
-              <a:t>Copyright © 2026 by Elephant Scale, All Rights Reserved</a:t>
-            </a:r>
-          </a:p>
-        </p:txBody>
-      </p:sp>
-      <p:pic>
-        <p:nvPicPr>
-          <p:cNvPr id="5" name="Picture 4" descr="1.png"/>
-          <p:cNvPicPr>
-            <a:picLocks noChangeAspect="1"/>
-          </p:cNvPicPr>
-          <p:nvPr/>
-        </p:nvPicPr>
-        <p:blipFill>
-          <a:blip r:embed="rId2"/>
-          <a:stretch>
-            <a:fillRect/>
-          </a:stretch>
-        </p:blipFill>
-        <p:spPr>
-          <a:xfrm>
-            <a:off x="0" y="1792224"/>
-            <a:ext cx="11531600" cy="3454400"/>
+            <a:off x="28575" y="2015331"/>
+            <a:ext cx="9411821" cy="2819400"/>
           </a:xfrm>
           <a:prstGeom prst="rect">
             <a:avLst/>
@@ -4715,8 +4947,8 @@
         </p:blipFill>
         <p:spPr>
           <a:xfrm>
-            <a:off x="0" y="3986783"/>
-            <a:ext cx="10007600" cy="787400"/>
+            <a:off x="34925" y="7036026"/>
+            <a:ext cx="9337675" cy="734690"/>
           </a:xfrm>
           <a:prstGeom prst="rect">
             <a:avLst/>
@@ -4732,7 +4964,7 @@
 </file>
 
 <file path=ppt/slides/slide8.xml><?xml version="1.0" encoding="utf-8"?>
-<p:sld xmlns:a="http://schemas.openxmlformats.org/drawingml/2006/main" xmlns:p="http://schemas.openxmlformats.org/presentationml/2006/main" xmlns:r="http://schemas.openxmlformats.org/officeDocument/2006/relationships">
+<p:sld xmlns:a="http://schemas.openxmlformats.org/drawingml/2006/main" xmlns:r="http://schemas.openxmlformats.org/officeDocument/2006/relationships" xmlns:p="http://schemas.openxmlformats.org/presentationml/2006/main">
   <p:cSld>
     <p:spTree>
       <p:nvGrpSpPr>
@@ -4740,7 +4972,14 @@
         <p:cNvGrpSpPr/>
         <p:nvPr/>
       </p:nvGrpSpPr>
-      <p:grpSpPr/>
+      <p:grpSpPr>
+        <a:xfrm>
+          <a:off x="0" y="0"/>
+          <a:ext cx="0" cy="0"/>
+          <a:chOff x="0" y="0"/>
+          <a:chExt cx="0" cy="0"/>
+        </a:xfrm>
+      </p:grpSpPr>
       <p:sp>
         <p:nvSpPr>
           <p:cNvPr id="2" name="Title 1"/>
@@ -4888,10 +5127,7 @@
               <a:t> cannot see</a:t>
             </a:r>
             <a:r>
-              <a:t> , and only catches updates if a timestamp column changes. For true change capture you</a:t>
-            </a:r>
-            <a:r>
-              <a:t> need</a:t>
+              <a:t> , and only catches updates if a timestamp column changes. For true change capture you need</a:t>
             </a:r>
             <a:r>
               <a:rPr b="1"/>
@@ -4945,7 +5181,7 @@
 </file>
 
 <file path=ppt/slides/slide9.xml><?xml version="1.0" encoding="utf-8"?>
-<p:sld xmlns:a="http://schemas.openxmlformats.org/drawingml/2006/main" xmlns:p="http://schemas.openxmlformats.org/presentationml/2006/main" xmlns:r="http://schemas.openxmlformats.org/officeDocument/2006/relationships">
+<p:sld xmlns:a="http://schemas.openxmlformats.org/drawingml/2006/main" xmlns:r="http://schemas.openxmlformats.org/officeDocument/2006/relationships" xmlns:p="http://schemas.openxmlformats.org/presentationml/2006/main">
   <p:cSld>
     <p:spTree>
       <p:nvGrpSpPr>
@@ -4953,7 +5189,14 @@
         <p:cNvGrpSpPr/>
         <p:nvPr/>
       </p:nvGrpSpPr>
-      <p:grpSpPr/>
+      <p:grpSpPr>
+        <a:xfrm>
+          <a:off x="0" y="0"/>
+          <a:ext cx="0" cy="0"/>
+          <a:chOff x="0" y="0"/>
+          <a:chExt cx="0" cy="0"/>
+        </a:xfrm>
+      </p:grpSpPr>
       <p:sp>
         <p:nvSpPr>
           <p:cNvPr id="2" name="Title 1"/>
@@ -4991,34 +5234,53 @@
           <a:lstStyle/>
           <a:p>
             <a:r>
+              <a:rPr dirty="0"/>
               <a:t> Two ways to get database changes into Kafka:</a:t>
             </a:r>
-          </a:p>
-          <a:p/>
-          <a:p/>
-          <a:p/>
-          <a:p/>
-          <a:p/>
-          <a:p/>
-          <a:p>
-            <a:r>
-              <a:rPr b="1"/>
+            <a:endParaRPr lang="en-US" dirty="0"/>
+          </a:p>
+          <a:p>
+            <a:endParaRPr lang="en-US" dirty="0"/>
+          </a:p>
+          <a:p>
+            <a:endParaRPr dirty="0"/>
+          </a:p>
+          <a:p>
+            <a:endParaRPr dirty="0"/>
+          </a:p>
+          <a:p>
+            <a:endParaRPr dirty="0"/>
+          </a:p>
+          <a:p>
+            <a:endParaRPr dirty="0"/>
+          </a:p>
+          <a:p>
+            <a:endParaRPr dirty="0"/>
+          </a:p>
+          <a:p>
+            <a:endParaRPr dirty="0"/>
+          </a:p>
+          <a:p>
+            <a:endParaRPr dirty="0"/>
+          </a:p>
+          <a:p>
+            <a:r>
+              <a:rPr b="1" dirty="0"/>
               <a:t> Poll</a:t>
             </a:r>
             <a:r>
+              <a:rPr dirty="0"/>
               <a:t> is fine for append-mostly tables and this course's labs</a:t>
             </a:r>
           </a:p>
           <a:p>
             <a:r>
-              <a:rPr b="1"/>
+              <a:rPr b="1" dirty="0"/>
               <a:t> CDC</a:t>
             </a:r>
             <a:r>
-              <a:t> is the production answer when you need every change, including deletes, with low DB</a:t>
-            </a:r>
-            <a:r>
-              <a:t> impact</a:t>
+              <a:rPr dirty="0"/>
+              <a:t> is the production answer when you need every change, including deletes, with low DB impact</a:t>
             </a:r>
           </a:p>
         </p:txBody>
@@ -5062,11 +5324,17 @@
           <p:cNvGraphicFramePr>
             <a:graphicFrameLocks noGrp="1"/>
           </p:cNvGraphicFramePr>
-          <p:nvPr/>
+          <p:nvPr>
+            <p:extLst>
+              <p:ext uri="{D42A27DB-BD31-4B8C-83A1-F6EECF244321}">
+                <p14:modId xmlns:p14="http://schemas.microsoft.com/office/powerpoint/2010/main" val="1674121609"/>
+              </p:ext>
+            </p:extLst>
+          </p:nvPr>
         </p:nvGraphicFramePr>
         <p:xfrm>
-          <a:off x="237744" y="1353312"/>
-          <a:ext cx="8915400" cy="2286000"/>
+          <a:off x="222250" y="2015331"/>
+          <a:ext cx="8915400" cy="2651760"/>
         </p:xfrm>
         <a:graphic>
           <a:graphicData uri="http://schemas.openxmlformats.org/drawingml/2006/table">
@@ -5075,9 +5343,27 @@
                 <a:tableStyleId>{5C22544A-7EE6-4342-B048-85BDC9FD1C3A}</a:tableStyleId>
               </a:tblPr>
               <a:tblGrid>
-                <a:gridCol w="2971800"/>
-                <a:gridCol w="2971800"/>
-                <a:gridCol w="2971800"/>
+                <a:gridCol w="2772156">
+                  <a:extLst>
+                    <a:ext uri="{9D8B030D-6E8A-4147-A177-3AD203B41FA5}">
+                      <a16:colId xmlns:a16="http://schemas.microsoft.com/office/drawing/2014/main" val="20000"/>
+                    </a:ext>
+                  </a:extLst>
+                </a:gridCol>
+                <a:gridCol w="3171444">
+                  <a:extLst>
+                    <a:ext uri="{9D8B030D-6E8A-4147-A177-3AD203B41FA5}">
+                      <a16:colId xmlns:a16="http://schemas.microsoft.com/office/drawing/2014/main" val="20001"/>
+                    </a:ext>
+                  </a:extLst>
+                </a:gridCol>
+                <a:gridCol w="2971800">
+                  <a:extLst>
+                    <a:ext uri="{9D8B030D-6E8A-4147-A177-3AD203B41FA5}">
+                      <a16:colId xmlns:a16="http://schemas.microsoft.com/office/drawing/2014/main" val="20002"/>
+                    </a:ext>
+                  </a:extLst>
+                </a:gridCol>
               </a:tblGrid>
               <a:tr h="457200">
                 <a:tc>
@@ -5085,9 +5371,7 @@
                     <a:bodyPr/>
                     <a:lstStyle/>
                     <a:p>
-                      <a:r>
-                        <a:t/>
-                      </a:r>
+                      <a:endParaRPr/>
                     </a:p>
                   </a:txBody>
                   <a:tcPr/>
@@ -5116,6 +5400,11 @@
                   </a:txBody>
                   <a:tcPr/>
                 </a:tc>
+                <a:extLst>
+                  <a:ext uri="{0D108BD9-81ED-4DB2-BD59-A6C34878D82A}">
+                    <a16:rowId xmlns:a16="http://schemas.microsoft.com/office/drawing/2014/main" val="10000"/>
+                  </a:ext>
+                </a:extLst>
               </a:tr>
               <a:tr h="457200">
                 <a:tc>
@@ -5161,6 +5450,11 @@
                   </a:txBody>
                   <a:tcPr/>
                 </a:tc>
+                <a:extLst>
+                  <a:ext uri="{0D108BD9-81ED-4DB2-BD59-A6C34878D82A}">
+                    <a16:rowId xmlns:a16="http://schemas.microsoft.com/office/drawing/2014/main" val="10001"/>
+                  </a:ext>
+                </a:extLst>
               </a:tr>
               <a:tr h="457200">
                 <a:tc>
@@ -5199,13 +5493,15 @@
                         <a:rPr b="1"/>
                         <a:t>and deletes</a:t>
                       </a:r>
-                      <a:r>
-                        <a:t/>
-                      </a:r>
                     </a:p>
                   </a:txBody>
                   <a:tcPr/>
                 </a:tc>
+                <a:extLst>
+                  <a:ext uri="{0D108BD9-81ED-4DB2-BD59-A6C34878D82A}">
+                    <a16:rowId xmlns:a16="http://schemas.microsoft.com/office/drawing/2014/main" val="10002"/>
+                  </a:ext>
+                </a:extLst>
               </a:tr>
               <a:tr h="457200">
                 <a:tc>
@@ -5244,6 +5540,11 @@
                   </a:txBody>
                   <a:tcPr/>
                 </a:tc>
+                <a:extLst>
+                  <a:ext uri="{0D108BD9-81ED-4DB2-BD59-A6C34878D82A}">
+                    <a16:rowId xmlns:a16="http://schemas.microsoft.com/office/drawing/2014/main" val="10003"/>
+                  </a:ext>
+                </a:extLst>
               </a:tr>
               <a:tr h="457200">
                 <a:tc>
@@ -5276,12 +5577,18 @@
                     <a:lstStyle/>
                     <a:p>
                       <a:r>
+                        <a:rPr dirty="0"/>
                         <a:t>more moving parts</a:t>
                       </a:r>
                     </a:p>
                   </a:txBody>
                   <a:tcPr/>
                 </a:tc>
+                <a:extLst>
+                  <a:ext uri="{0D108BD9-81ED-4DB2-BD59-A6C34878D82A}">
+                    <a16:rowId xmlns:a16="http://schemas.microsoft.com/office/drawing/2014/main" val="10004"/>
+                  </a:ext>
+                </a:extLst>
               </a:tr>
             </a:tbl>
           </a:graphicData>
